--- a/ONIP-FISA/Detramage/ONIP-2_Detramage.pptx
+++ b/ONIP-FISA/Detramage/ONIP-2_Detramage.pptx
@@ -212,7 +212,7 @@
           <a:p>
             <a:fld id="{95F60532-AC81-4152-B45E-E054A978F780}" type="datetimeFigureOut">
               <a:rPr lang="fr-FR" smtClean="0"/>
-              <a:t>29/04/2025</a:t>
+              <a:t>03/04/2026</a:t>
             </a:fld>
             <a:endParaRPr lang="fr-FR"/>
           </a:p>
@@ -1079,7 +1079,7 @@
           <a:p>
             <a:fld id="{02AC24A9-CCB6-4F8D-B8DB-C2F3692CFA5A}" type="datetimeFigureOut">
               <a:rPr lang="en-US" smtClean="0"/>
-              <a:t>4/29/2025</a:t>
+              <a:t>4/3/2026</a:t>
             </a:fld>
             <a:endParaRPr lang="en-US" dirty="0"/>
           </a:p>
@@ -1449,7 +1449,7 @@
           <a:p>
             <a:fld id="{02AC24A9-CCB6-4F8D-B8DB-C2F3692CFA5A}" type="datetimeFigureOut">
               <a:rPr lang="en-US" smtClean="0"/>
-              <a:t>4/29/2025</a:t>
+              <a:t>4/3/2026</a:t>
             </a:fld>
             <a:endParaRPr lang="en-US"/>
           </a:p>
@@ -1658,7 +1658,7 @@
           <a:p>
             <a:fld id="{02AC24A9-CCB6-4F8D-B8DB-C2F3692CFA5A}" type="datetimeFigureOut">
               <a:rPr lang="en-US" smtClean="0"/>
-              <a:t>4/29/2025</a:t>
+              <a:t>4/3/2026</a:t>
             </a:fld>
             <a:endParaRPr lang="en-US"/>
           </a:p>
@@ -2128,7 +2128,7 @@
           <a:p>
             <a:fld id="{02AC24A9-CCB6-4F8D-B8DB-C2F3692CFA5A}" type="datetimeFigureOut">
               <a:rPr lang="en-US" smtClean="0"/>
-              <a:t>4/29/2025</a:t>
+              <a:t>4/3/2026</a:t>
             </a:fld>
             <a:endParaRPr lang="en-US"/>
           </a:p>
@@ -2582,7 +2582,7 @@
           <a:p>
             <a:fld id="{02AC24A9-CCB6-4F8D-B8DB-C2F3692CFA5A}" type="datetimeFigureOut">
               <a:rPr lang="en-US" smtClean="0"/>
-              <a:t>4/29/2025</a:t>
+              <a:t>4/3/2026</a:t>
             </a:fld>
             <a:endParaRPr lang="en-US"/>
           </a:p>
@@ -3114,7 +3114,7 @@
           <a:p>
             <a:fld id="{02AC24A9-CCB6-4F8D-B8DB-C2F3692CFA5A}" type="datetimeFigureOut">
               <a:rPr lang="en-US" smtClean="0"/>
-              <a:t>4/29/2025</a:t>
+              <a:t>4/3/2026</a:t>
             </a:fld>
             <a:endParaRPr lang="en-US"/>
           </a:p>
@@ -3813,7 +3813,7 @@
           <a:p>
             <a:fld id="{02AC24A9-CCB6-4F8D-B8DB-C2F3692CFA5A}" type="datetimeFigureOut">
               <a:rPr lang="en-US" smtClean="0"/>
-              <a:t>4/29/2025</a:t>
+              <a:t>4/3/2026</a:t>
             </a:fld>
             <a:endParaRPr lang="en-US"/>
           </a:p>
@@ -4142,7 +4142,7 @@
           <a:p>
             <a:fld id="{02AC24A9-CCB6-4F8D-B8DB-C2F3692CFA5A}" type="datetimeFigureOut">
               <a:rPr lang="en-US" smtClean="0"/>
-              <a:t>4/29/2025</a:t>
+              <a:t>4/3/2026</a:t>
             </a:fld>
             <a:endParaRPr lang="en-US"/>
           </a:p>
@@ -4255,7 +4255,7 @@
           <a:p>
             <a:fld id="{02AC24A9-CCB6-4F8D-B8DB-C2F3692CFA5A}" type="datetimeFigureOut">
               <a:rPr lang="en-US" smtClean="0"/>
-              <a:t>4/29/2025</a:t>
+              <a:t>4/3/2026</a:t>
             </a:fld>
             <a:endParaRPr lang="en-US"/>
           </a:p>
@@ -4750,7 +4750,7 @@
           <a:p>
             <a:fld id="{02AC24A9-CCB6-4F8D-B8DB-C2F3692CFA5A}" type="datetimeFigureOut">
               <a:rPr lang="en-US" smtClean="0"/>
-              <a:t>4/29/2025</a:t>
+              <a:t>4/3/2026</a:t>
             </a:fld>
             <a:endParaRPr lang="en-US" dirty="0"/>
           </a:p>
@@ -5227,7 +5227,7 @@
           <a:p>
             <a:fld id="{02AC24A9-CCB6-4F8D-B8DB-C2F3692CFA5A}" type="datetimeFigureOut">
               <a:rPr lang="en-US" smtClean="0"/>
-              <a:t>4/29/2025</a:t>
+              <a:t>4/3/2026</a:t>
             </a:fld>
             <a:endParaRPr lang="en-US"/>
           </a:p>
@@ -5470,7 +5470,7 @@
           <a:p>
             <a:fld id="{02AC24A9-CCB6-4F8D-B8DB-C2F3692CFA5A}" type="datetimeFigureOut">
               <a:rPr lang="en-US" smtClean="0"/>
-              <a:t>4/29/2025</a:t>
+              <a:t>4/3/2026</a:t>
             </a:fld>
             <a:endParaRPr lang="en-US"/>
           </a:p>
@@ -7118,10 +7118,10 @@
       </p:sp>
       <p:sp>
         <p:nvSpPr>
-          <p:cNvPr id="8" name="Rectangle 7">
-            <a:extLst>
-              <a:ext uri="{FF2B5EF4-FFF2-40B4-BE49-F238E27FC236}">
-                <a16:creationId xmlns:a16="http://schemas.microsoft.com/office/drawing/2014/main" id="{D8BE85BC-4EC6-68AE-673A-DB0EFDBD3520}"/>
+          <p:cNvPr id="5" name="Rectangle 4">
+            <a:extLst>
+              <a:ext uri="{FF2B5EF4-FFF2-40B4-BE49-F238E27FC236}">
+                <a16:creationId xmlns:a16="http://schemas.microsoft.com/office/drawing/2014/main" id="{16936E26-517B-8FB0-F81C-B5922FBE3524}"/>
               </a:ext>
             </a:extLst>
           </p:cNvPr>
@@ -7137,10 +7137,12 @@
             <a:avLst/>
           </a:prstGeom>
           <a:solidFill>
-            <a:srgbClr val="002060"/>
+            <a:schemeClr val="bg1"/>
           </a:solidFill>
           <a:ln>
-            <a:noFill/>
+            <a:solidFill>
+              <a:srgbClr val="002060"/>
+            </a:solidFill>
           </a:ln>
         </p:spPr>
         <p:style>
@@ -7170,10 +7172,10 @@
       </p:sp>
       <p:sp>
         <p:nvSpPr>
-          <p:cNvPr id="11" name="Rectangle 10">
-            <a:extLst>
-              <a:ext uri="{FF2B5EF4-FFF2-40B4-BE49-F238E27FC236}">
-                <a16:creationId xmlns:a16="http://schemas.microsoft.com/office/drawing/2014/main" id="{E03280E2-A3F0-03CB-7863-26E43FDFAACD}"/>
+          <p:cNvPr id="19" name="Rectangle 18">
+            <a:extLst>
+              <a:ext uri="{FF2B5EF4-FFF2-40B4-BE49-F238E27FC236}">
+                <a16:creationId xmlns:a16="http://schemas.microsoft.com/office/drawing/2014/main" id="{2AE6653D-F0AA-E196-5E20-9F9166D7EDF2}"/>
               </a:ext>
             </a:extLst>
           </p:cNvPr>
@@ -7232,10 +7234,10 @@
       </p:sp>
       <p:sp>
         <p:nvSpPr>
-          <p:cNvPr id="13" name="Rectangle 12">
-            <a:extLst>
-              <a:ext uri="{FF2B5EF4-FFF2-40B4-BE49-F238E27FC236}">
-                <a16:creationId xmlns:a16="http://schemas.microsoft.com/office/drawing/2014/main" id="{098DA644-EC8C-61FE-90A2-778EF2B7DF36}"/>
+          <p:cNvPr id="25" name="Rectangle 24">
+            <a:extLst>
+              <a:ext uri="{FF2B5EF4-FFF2-40B4-BE49-F238E27FC236}">
+                <a16:creationId xmlns:a16="http://schemas.microsoft.com/office/drawing/2014/main" id="{03C0E084-04BA-01D9-56F2-6CEC771B022E}"/>
               </a:ext>
             </a:extLst>
           </p:cNvPr>
@@ -7278,16 +7280,19 @@
           <a:lstStyle/>
           <a:p>
             <a:pPr algn="ctr"/>
-            <a:endParaRPr lang="fr-FR" sz="1600" dirty="0"/>
-          </a:p>
-        </p:txBody>
-      </p:sp>
-      <p:sp>
-        <p:nvSpPr>
-          <p:cNvPr id="14" name="Rectangle 13">
-            <a:extLst>
-              <a:ext uri="{FF2B5EF4-FFF2-40B4-BE49-F238E27FC236}">
-                <a16:creationId xmlns:a16="http://schemas.microsoft.com/office/drawing/2014/main" id="{021B992C-31E5-6213-5092-4CCBE55F2B39}"/>
+            <a:r>
+              <a:rPr lang="fr-FR" sz="1600" dirty="0"/>
+              <a:t>1</a:t>
+            </a:r>
+          </a:p>
+        </p:txBody>
+      </p:sp>
+      <p:sp>
+        <p:nvSpPr>
+          <p:cNvPr id="26" name="Rectangle 25">
+            <a:extLst>
+              <a:ext uri="{FF2B5EF4-FFF2-40B4-BE49-F238E27FC236}">
+                <a16:creationId xmlns:a16="http://schemas.microsoft.com/office/drawing/2014/main" id="{5DF50335-FD71-42B1-A255-7EA36E1DA0D9}"/>
               </a:ext>
             </a:extLst>
           </p:cNvPr>
@@ -7330,16 +7335,19 @@
           <a:lstStyle/>
           <a:p>
             <a:pPr algn="ctr"/>
-            <a:endParaRPr lang="fr-FR" sz="1600" dirty="0"/>
-          </a:p>
-        </p:txBody>
-      </p:sp>
-      <p:sp>
-        <p:nvSpPr>
-          <p:cNvPr id="15" name="Rectangle 14">
-            <a:extLst>
-              <a:ext uri="{FF2B5EF4-FFF2-40B4-BE49-F238E27FC236}">
-                <a16:creationId xmlns:a16="http://schemas.microsoft.com/office/drawing/2014/main" id="{0D770ED0-474D-9648-552F-CF79EB8C490D}"/>
+            <a:r>
+              <a:rPr lang="fr-FR" sz="1600" dirty="0"/>
+              <a:t>2</a:t>
+            </a:r>
+          </a:p>
+        </p:txBody>
+      </p:sp>
+      <p:sp>
+        <p:nvSpPr>
+          <p:cNvPr id="27" name="Rectangle 26">
+            <a:extLst>
+              <a:ext uri="{FF2B5EF4-FFF2-40B4-BE49-F238E27FC236}">
+                <a16:creationId xmlns:a16="http://schemas.microsoft.com/office/drawing/2014/main" id="{B7435FFF-4A68-7153-6B3F-AE350E9CF372}"/>
               </a:ext>
             </a:extLst>
           </p:cNvPr>
@@ -7348,14 +7356,14 @@
         </p:nvSpPr>
         <p:spPr>
           <a:xfrm>
-            <a:off x="11327289" y="3244334"/>
+            <a:off x="11327289" y="4467223"/>
             <a:ext cx="387096" cy="369332"/>
           </a:xfrm>
           <a:prstGeom prst="rect">
             <a:avLst/>
           </a:prstGeom>
           <a:solidFill>
-            <a:srgbClr val="D6B4B2"/>
+            <a:srgbClr val="002060"/>
           </a:solidFill>
           <a:ln>
             <a:noFill/>
@@ -7382,16 +7390,19 @@
           <a:lstStyle/>
           <a:p>
             <a:pPr algn="ctr"/>
-            <a:endParaRPr lang="fr-FR" sz="1600" dirty="0"/>
-          </a:p>
-        </p:txBody>
-      </p:sp>
-      <p:sp>
-        <p:nvSpPr>
-          <p:cNvPr id="16" name="Rectangle 15">
-            <a:extLst>
-              <a:ext uri="{FF2B5EF4-FFF2-40B4-BE49-F238E27FC236}">
-                <a16:creationId xmlns:a16="http://schemas.microsoft.com/office/drawing/2014/main" id="{AD6AB33F-119B-3F1B-F6FF-1B69419C6403}"/>
+            <a:r>
+              <a:rPr lang="fr-FR" sz="1600" dirty="0"/>
+              <a:t>7</a:t>
+            </a:r>
+          </a:p>
+        </p:txBody>
+      </p:sp>
+      <p:sp>
+        <p:nvSpPr>
+          <p:cNvPr id="28" name="Rectangle 27">
+            <a:extLst>
+              <a:ext uri="{FF2B5EF4-FFF2-40B4-BE49-F238E27FC236}">
+                <a16:creationId xmlns:a16="http://schemas.microsoft.com/office/drawing/2014/main" id="{DF1E259A-D9DD-9163-7571-569BF6A40F53}"/>
               </a:ext>
             </a:extLst>
           </p:cNvPr>
@@ -7450,10 +7461,10 @@
       </p:sp>
       <p:sp>
         <p:nvSpPr>
-          <p:cNvPr id="17" name="Rectangle 16">
-            <a:extLst>
-              <a:ext uri="{FF2B5EF4-FFF2-40B4-BE49-F238E27FC236}">
-                <a16:creationId xmlns:a16="http://schemas.microsoft.com/office/drawing/2014/main" id="{FB575922-835C-241C-709B-AB12BD7E173C}"/>
+          <p:cNvPr id="29" name="Rectangle 28">
+            <a:extLst>
+              <a:ext uri="{FF2B5EF4-FFF2-40B4-BE49-F238E27FC236}">
+                <a16:creationId xmlns:a16="http://schemas.microsoft.com/office/drawing/2014/main" id="{41B6DE10-8475-633F-1122-594557E650EA}"/>
               </a:ext>
             </a:extLst>
           </p:cNvPr>
@@ -7509,10 +7520,10 @@
       </p:sp>
       <p:sp>
         <p:nvSpPr>
-          <p:cNvPr id="18" name="Rectangle 17">
-            <a:extLst>
-              <a:ext uri="{FF2B5EF4-FFF2-40B4-BE49-F238E27FC236}">
-                <a16:creationId xmlns:a16="http://schemas.microsoft.com/office/drawing/2014/main" id="{86F7F968-D1E2-15AA-9E7A-58F30CD84152}"/>
+          <p:cNvPr id="30" name="Rectangle 29">
+            <a:extLst>
+              <a:ext uri="{FF2B5EF4-FFF2-40B4-BE49-F238E27FC236}">
+                <a16:creationId xmlns:a16="http://schemas.microsoft.com/office/drawing/2014/main" id="{C05B3E1B-9BE5-F493-2DFA-09B1AB1B0BA9}"/>
               </a:ext>
             </a:extLst>
           </p:cNvPr>
@@ -7568,10 +7579,10 @@
       </p:sp>
       <p:sp>
         <p:nvSpPr>
-          <p:cNvPr id="20" name="Rectangle 19">
-            <a:extLst>
-              <a:ext uri="{FF2B5EF4-FFF2-40B4-BE49-F238E27FC236}">
-                <a16:creationId xmlns:a16="http://schemas.microsoft.com/office/drawing/2014/main" id="{B4740186-9013-1F9D-7EA1-44560C103898}"/>
+          <p:cNvPr id="31" name="Rectangle 30">
+            <a:extLst>
+              <a:ext uri="{FF2B5EF4-FFF2-40B4-BE49-F238E27FC236}">
+                <a16:creationId xmlns:a16="http://schemas.microsoft.com/office/drawing/2014/main" id="{01138F17-D5E8-13FB-6AEC-C89E794125E6}"/>
               </a:ext>
             </a:extLst>
           </p:cNvPr>
@@ -7614,16 +7625,19 @@
           <a:lstStyle/>
           <a:p>
             <a:pPr algn="ctr"/>
-            <a:endParaRPr lang="fr-FR" sz="1600" dirty="0"/>
-          </a:p>
-        </p:txBody>
-      </p:sp>
-      <p:sp>
-        <p:nvSpPr>
-          <p:cNvPr id="21" name="Rectangle 20">
-            <a:extLst>
-              <a:ext uri="{FF2B5EF4-FFF2-40B4-BE49-F238E27FC236}">
-                <a16:creationId xmlns:a16="http://schemas.microsoft.com/office/drawing/2014/main" id="{040E83FC-64FA-353E-D05A-9B1F5F5F25C8}"/>
+            <a:r>
+              <a:rPr lang="fr-FR" sz="1600" dirty="0"/>
+              <a:t>4</a:t>
+            </a:r>
+          </a:p>
+        </p:txBody>
+      </p:sp>
+      <p:sp>
+        <p:nvSpPr>
+          <p:cNvPr id="32" name="Rectangle 31">
+            <a:extLst>
+              <a:ext uri="{FF2B5EF4-FFF2-40B4-BE49-F238E27FC236}">
+                <a16:creationId xmlns:a16="http://schemas.microsoft.com/office/drawing/2014/main" id="{D7C6FFD9-5BED-D122-1A2F-F736F3B24612}"/>
               </a:ext>
             </a:extLst>
           </p:cNvPr>
@@ -7639,7 +7653,7 @@
             <a:avLst/>
           </a:prstGeom>
           <a:solidFill>
-            <a:srgbClr val="D6B4B2"/>
+            <a:srgbClr val="002060"/>
           </a:solidFill>
           <a:ln>
             <a:noFill/>
@@ -7666,16 +7680,19 @@
           <a:lstStyle/>
           <a:p>
             <a:pPr algn="ctr"/>
-            <a:endParaRPr lang="fr-FR" sz="1600" dirty="0"/>
-          </a:p>
-        </p:txBody>
-      </p:sp>
-      <p:sp>
-        <p:nvSpPr>
-          <p:cNvPr id="22" name="Rectangle 21">
-            <a:extLst>
-              <a:ext uri="{FF2B5EF4-FFF2-40B4-BE49-F238E27FC236}">
-                <a16:creationId xmlns:a16="http://schemas.microsoft.com/office/drawing/2014/main" id="{A0EB135E-EF9B-D1F5-E612-5F0F278D99FE}"/>
+            <a:r>
+              <a:rPr lang="fr-FR" sz="1600" dirty="0"/>
+              <a:t>6</a:t>
+            </a:r>
+          </a:p>
+        </p:txBody>
+      </p:sp>
+      <p:sp>
+        <p:nvSpPr>
+          <p:cNvPr id="33" name="Rectangle 32">
+            <a:extLst>
+              <a:ext uri="{FF2B5EF4-FFF2-40B4-BE49-F238E27FC236}">
+                <a16:creationId xmlns:a16="http://schemas.microsoft.com/office/drawing/2014/main" id="{9B27A36F-4E13-E953-0943-AA43965C8978}"/>
               </a:ext>
             </a:extLst>
           </p:cNvPr>
@@ -7684,8 +7701,8 @@
         </p:nvSpPr>
         <p:spPr>
           <a:xfrm>
-            <a:off x="11327289" y="4798076"/>
-            <a:ext cx="387096" cy="369332"/>
+            <a:off x="10332720" y="4479277"/>
+            <a:ext cx="761073" cy="369332"/>
           </a:xfrm>
           <a:prstGeom prst="rect">
             <a:avLst/>
@@ -7719,22 +7736,22 @@
           <a:p>
             <a:pPr algn="ctr"/>
             <a:r>
-              <a:rPr lang="fr-FR" sz="1600" dirty="0">
+              <a:rPr lang="fr-FR" sz="1400" b="1" dirty="0">
                 <a:solidFill>
                   <a:schemeClr val="tx1"/>
                 </a:solidFill>
               </a:rPr>
-              <a:t>x</a:t>
-            </a:r>
-          </a:p>
-        </p:txBody>
-      </p:sp>
-      <p:sp>
-        <p:nvSpPr>
-          <p:cNvPr id="23" name="Rectangle 22">
-            <a:extLst>
-              <a:ext uri="{FF2B5EF4-FFF2-40B4-BE49-F238E27FC236}">
-                <a16:creationId xmlns:a16="http://schemas.microsoft.com/office/drawing/2014/main" id="{5DF7F23C-EF65-9DE8-7387-640B14B54474}"/>
+              <a:t>TP3a</a:t>
+            </a:r>
+          </a:p>
+        </p:txBody>
+      </p:sp>
+      <p:sp>
+        <p:nvSpPr>
+          <p:cNvPr id="35" name="Rectangle 34">
+            <a:extLst>
+              <a:ext uri="{FF2B5EF4-FFF2-40B4-BE49-F238E27FC236}">
+                <a16:creationId xmlns:a16="http://schemas.microsoft.com/office/drawing/2014/main" id="{CC86E520-3265-1FC6-C490-C078F449DAE0}"/>
               </a:ext>
             </a:extLst>
           </p:cNvPr>
@@ -7743,7 +7760,7 @@
         </p:nvSpPr>
         <p:spPr>
           <a:xfrm>
-            <a:off x="10332720" y="5198049"/>
+            <a:off x="10332720" y="5221587"/>
             <a:ext cx="761073" cy="369332"/>
           </a:xfrm>
           <a:prstGeom prst="rect">
@@ -7783,17 +7800,17 @@
                   <a:schemeClr val="tx1"/>
                 </a:solidFill>
               </a:rPr>
-              <a:t>TP3a</a:t>
-            </a:r>
-          </a:p>
-        </p:txBody>
-      </p:sp>
-      <p:sp>
-        <p:nvSpPr>
-          <p:cNvPr id="24" name="Rectangle 23">
-            <a:extLst>
-              <a:ext uri="{FF2B5EF4-FFF2-40B4-BE49-F238E27FC236}">
-                <a16:creationId xmlns:a16="http://schemas.microsoft.com/office/drawing/2014/main" id="{D81CF90D-44C0-BB2F-D938-BCC20C548A91}"/>
+              <a:t>TP3b</a:t>
+            </a:r>
+          </a:p>
+        </p:txBody>
+      </p:sp>
+      <p:sp>
+        <p:nvSpPr>
+          <p:cNvPr id="36" name="Rectangle 35">
+            <a:extLst>
+              <a:ext uri="{FF2B5EF4-FFF2-40B4-BE49-F238E27FC236}">
+                <a16:creationId xmlns:a16="http://schemas.microsoft.com/office/drawing/2014/main" id="{1AECEF21-ED07-AEAE-B797-5124CFE4D1BB}"/>
               </a:ext>
             </a:extLst>
           </p:cNvPr>
@@ -7802,8 +7819,8 @@
         </p:nvSpPr>
         <p:spPr>
           <a:xfrm>
-            <a:off x="10332720" y="5598022"/>
-            <a:ext cx="761073" cy="369332"/>
+            <a:off x="11327289" y="5621560"/>
+            <a:ext cx="387096" cy="369332"/>
           </a:xfrm>
           <a:prstGeom prst="rect">
             <a:avLst/>
@@ -7837,22 +7854,18 @@
           <a:p>
             <a:pPr algn="ctr"/>
             <a:r>
-              <a:rPr lang="fr-FR" sz="1400" b="1" dirty="0">
-                <a:solidFill>
-                  <a:schemeClr val="tx1"/>
-                </a:solidFill>
-              </a:rPr>
-              <a:t>TP3b</a:t>
-            </a:r>
-          </a:p>
-        </p:txBody>
-      </p:sp>
-      <p:sp>
-        <p:nvSpPr>
-          <p:cNvPr id="34" name="Rectangle 33">
-            <a:extLst>
-              <a:ext uri="{FF2B5EF4-FFF2-40B4-BE49-F238E27FC236}">
-                <a16:creationId xmlns:a16="http://schemas.microsoft.com/office/drawing/2014/main" id="{9BED3722-DE00-706C-1FEF-87BE444AB70F}"/>
+              <a:rPr lang="fr-FR" sz="1600" dirty="0"/>
+              <a:t>9</a:t>
+            </a:r>
+          </a:p>
+        </p:txBody>
+      </p:sp>
+      <p:sp>
+        <p:nvSpPr>
+          <p:cNvPr id="37" name="Rectangle 36">
+            <a:extLst>
+              <a:ext uri="{FF2B5EF4-FFF2-40B4-BE49-F238E27FC236}">
+                <a16:creationId xmlns:a16="http://schemas.microsoft.com/office/drawing/2014/main" id="{2DF29D9F-4C74-37BE-3B27-0E1DA2DBFFCC}"/>
               </a:ext>
             </a:extLst>
           </p:cNvPr>
@@ -7861,7 +7874,7 @@
         </p:nvSpPr>
         <p:spPr>
           <a:xfrm>
-            <a:off x="11327289" y="5198049"/>
+            <a:off x="10703028" y="5625691"/>
             <a:ext cx="387096" cy="369332"/>
           </a:xfrm>
           <a:prstGeom prst="rect">
@@ -7895,16 +7908,19 @@
           <a:lstStyle/>
           <a:p>
             <a:pPr algn="ctr"/>
-            <a:endParaRPr lang="fr-FR" sz="1600" dirty="0"/>
-          </a:p>
-        </p:txBody>
-      </p:sp>
-      <p:sp>
-        <p:nvSpPr>
-          <p:cNvPr id="56" name="Rectangle 55">
-            <a:extLst>
-              <a:ext uri="{FF2B5EF4-FFF2-40B4-BE49-F238E27FC236}">
-                <a16:creationId xmlns:a16="http://schemas.microsoft.com/office/drawing/2014/main" id="{D8DCA5EE-EC8C-762E-F627-A72AA8861359}"/>
+            <a:r>
+              <a:rPr lang="fr-FR" sz="1600" dirty="0"/>
+              <a:t>8</a:t>
+            </a:r>
+          </a:p>
+        </p:txBody>
+      </p:sp>
+      <p:sp>
+        <p:nvSpPr>
+          <p:cNvPr id="38" name="Rectangle 37">
+            <a:extLst>
+              <a:ext uri="{FF2B5EF4-FFF2-40B4-BE49-F238E27FC236}">
+                <a16:creationId xmlns:a16="http://schemas.microsoft.com/office/drawing/2014/main" id="{43D5450D-EFC5-46A6-CF74-2810518A5390}"/>
               </a:ext>
             </a:extLst>
           </p:cNvPr>
@@ -7913,18 +7929,15 @@
         </p:nvSpPr>
         <p:spPr>
           <a:xfrm>
-            <a:off x="11327289" y="5598022"/>
-            <a:ext cx="387096" cy="369332"/>
+            <a:off x="10130029" y="1485258"/>
+            <a:ext cx="1554480" cy="146304"/>
           </a:xfrm>
           <a:prstGeom prst="rect">
             <a:avLst/>
           </a:prstGeom>
           <a:solidFill>
-            <a:srgbClr val="002060"/>
+            <a:srgbClr val="00B0F0"/>
           </a:solidFill>
-          <a:ln>
-            <a:noFill/>
-          </a:ln>
         </p:spPr>
         <p:style>
           <a:lnRef idx="2">
@@ -7947,16 +7960,19 @@
           <a:lstStyle/>
           <a:p>
             <a:pPr algn="ctr"/>
-            <a:endParaRPr lang="fr-FR" sz="1600" dirty="0"/>
-          </a:p>
-        </p:txBody>
-      </p:sp>
-      <p:sp>
-        <p:nvSpPr>
-          <p:cNvPr id="57" name="Rectangle 56">
-            <a:extLst>
-              <a:ext uri="{FF2B5EF4-FFF2-40B4-BE49-F238E27FC236}">
-                <a16:creationId xmlns:a16="http://schemas.microsoft.com/office/drawing/2014/main" id="{73BFF83E-CD23-C05E-0C43-DDC2DBC90EAF}"/>
+            <a:r>
+              <a:rPr lang="fr-FR" sz="1100" dirty="0"/>
+              <a:t>ENTREPRISE</a:t>
+            </a:r>
+          </a:p>
+        </p:txBody>
+      </p:sp>
+      <p:sp>
+        <p:nvSpPr>
+          <p:cNvPr id="39" name="Rectangle 38">
+            <a:extLst>
+              <a:ext uri="{FF2B5EF4-FFF2-40B4-BE49-F238E27FC236}">
+                <a16:creationId xmlns:a16="http://schemas.microsoft.com/office/drawing/2014/main" id="{8F60F132-C6FA-1C73-9EB0-C2E792DCCC0D}"/>
               </a:ext>
             </a:extLst>
           </p:cNvPr>
@@ -7965,7 +7981,7 @@
         </p:nvSpPr>
         <p:spPr>
           <a:xfrm>
-            <a:off x="10130029" y="1485258"/>
+            <a:off x="10130029" y="2963188"/>
             <a:ext cx="1554480" cy="146304"/>
           </a:xfrm>
           <a:prstGeom prst="rect">
@@ -8005,10 +8021,10 @@
       </p:sp>
       <p:sp>
         <p:nvSpPr>
-          <p:cNvPr id="58" name="Rectangle 57">
-            <a:extLst>
-              <a:ext uri="{FF2B5EF4-FFF2-40B4-BE49-F238E27FC236}">
-                <a16:creationId xmlns:a16="http://schemas.microsoft.com/office/drawing/2014/main" id="{15CB116D-1016-8888-8DA0-C2E41081E8BF}"/>
+          <p:cNvPr id="40" name="Rectangle 39">
+            <a:extLst>
+              <a:ext uri="{FF2B5EF4-FFF2-40B4-BE49-F238E27FC236}">
+                <a16:creationId xmlns:a16="http://schemas.microsoft.com/office/drawing/2014/main" id="{701F75BB-6A37-9439-4E39-B762E61F774A}"/>
               </a:ext>
             </a:extLst>
           </p:cNvPr>
@@ -8017,7 +8033,7 @@
         </p:nvSpPr>
         <p:spPr>
           <a:xfrm>
-            <a:off x="10130029" y="2963188"/>
+            <a:off x="10130029" y="4942242"/>
             <a:ext cx="1554480" cy="146304"/>
           </a:xfrm>
           <a:prstGeom prst="rect">
@@ -8057,10 +8073,10 @@
       </p:sp>
       <p:sp>
         <p:nvSpPr>
-          <p:cNvPr id="59" name="Rectangle 58">
-            <a:extLst>
-              <a:ext uri="{FF2B5EF4-FFF2-40B4-BE49-F238E27FC236}">
-                <a16:creationId xmlns:a16="http://schemas.microsoft.com/office/drawing/2014/main" id="{16DF2A7E-C2C5-8E04-1F92-9CF79CBD9578}"/>
+          <p:cNvPr id="41" name="Rectangle 40">
+            <a:extLst>
+              <a:ext uri="{FF2B5EF4-FFF2-40B4-BE49-F238E27FC236}">
+                <a16:creationId xmlns:a16="http://schemas.microsoft.com/office/drawing/2014/main" id="{4045BA83-21FB-A26F-0EF5-C2B21666003D}"/>
               </a:ext>
             </a:extLst>
           </p:cNvPr>
@@ -8069,15 +8085,18 @@
         </p:nvSpPr>
         <p:spPr>
           <a:xfrm>
-            <a:off x="10130029" y="4518731"/>
-            <a:ext cx="1554480" cy="146304"/>
+            <a:off x="11327289" y="3237259"/>
+            <a:ext cx="387096" cy="369332"/>
           </a:xfrm>
           <a:prstGeom prst="rect">
             <a:avLst/>
           </a:prstGeom>
           <a:solidFill>
-            <a:srgbClr val="00B0F0"/>
+            <a:srgbClr val="D6B4B2"/>
           </a:solidFill>
+          <a:ln>
+            <a:noFill/>
+          </a:ln>
         </p:spPr>
         <p:style>
           <a:lnRef idx="2">
@@ -8101,8 +8120,63 @@
           <a:p>
             <a:pPr algn="ctr"/>
             <a:r>
-              <a:rPr lang="fr-FR" sz="1100" dirty="0"/>
-              <a:t>ENTREPRISE</a:t>
+              <a:rPr lang="fr-FR" sz="1600" dirty="0"/>
+              <a:t>3</a:t>
+            </a:r>
+          </a:p>
+        </p:txBody>
+      </p:sp>
+      <p:sp>
+        <p:nvSpPr>
+          <p:cNvPr id="44" name="Rectangle 43">
+            <a:extLst>
+              <a:ext uri="{FF2B5EF4-FFF2-40B4-BE49-F238E27FC236}">
+                <a16:creationId xmlns:a16="http://schemas.microsoft.com/office/drawing/2014/main" id="{C42541E0-6380-2436-29EA-97D26DC8570F}"/>
+              </a:ext>
+            </a:extLst>
+          </p:cNvPr>
+          <p:cNvSpPr/>
+          <p:nvPr/>
+        </p:nvSpPr>
+        <p:spPr>
+          <a:xfrm>
+            <a:off x="9808481" y="4044280"/>
+            <a:ext cx="387096" cy="369332"/>
+          </a:xfrm>
+          <a:prstGeom prst="rect">
+            <a:avLst/>
+          </a:prstGeom>
+          <a:solidFill>
+            <a:srgbClr val="D6B4B2"/>
+          </a:solidFill>
+          <a:ln>
+            <a:noFill/>
+          </a:ln>
+        </p:spPr>
+        <p:style>
+          <a:lnRef idx="2">
+            <a:schemeClr val="accent1">
+              <a:shade val="15000"/>
+            </a:schemeClr>
+          </a:lnRef>
+          <a:fillRef idx="1">
+            <a:schemeClr val="accent1"/>
+          </a:fillRef>
+          <a:effectRef idx="0">
+            <a:schemeClr val="accent1"/>
+          </a:effectRef>
+          <a:fontRef idx="minor">
+            <a:schemeClr val="lt1"/>
+          </a:fontRef>
+        </p:style>
+        <p:txBody>
+          <a:bodyPr rtlCol="0" anchor="ctr"/>
+          <a:lstStyle/>
+          <a:p>
+            <a:pPr algn="ctr"/>
+            <a:r>
+              <a:rPr lang="fr-FR" sz="1600" dirty="0"/>
+              <a:t>5</a:t>
             </a:r>
           </a:p>
         </p:txBody>
@@ -8481,997 +8555,6 @@
               </a:rPr>
               <a:t>2 séances</a:t>
             </a:r>
-          </a:p>
-        </p:txBody>
-      </p:sp>
-      <p:sp>
-        <p:nvSpPr>
-          <p:cNvPr id="9" name="Rectangle 8">
-            <a:extLst>
-              <a:ext uri="{FF2B5EF4-FFF2-40B4-BE49-F238E27FC236}">
-                <a16:creationId xmlns:a16="http://schemas.microsoft.com/office/drawing/2014/main" id="{73CBC69B-9407-C284-5271-2EFCA0D64B62}"/>
-              </a:ext>
-            </a:extLst>
-          </p:cNvPr>
-          <p:cNvSpPr/>
-          <p:nvPr/>
-        </p:nvSpPr>
-        <p:spPr>
-          <a:xfrm>
-            <a:off x="10332720" y="2102563"/>
-            <a:ext cx="731197" cy="369332"/>
-          </a:xfrm>
-          <a:prstGeom prst="rect">
-            <a:avLst/>
-          </a:prstGeom>
-          <a:solidFill>
-            <a:schemeClr val="accent2">
-              <a:lumMod val="60000"/>
-              <a:lumOff val="40000"/>
-            </a:schemeClr>
-          </a:solidFill>
-          <a:ln>
-            <a:noFill/>
-          </a:ln>
-        </p:spPr>
-        <p:style>
-          <a:lnRef idx="2">
-            <a:schemeClr val="accent1">
-              <a:shade val="15000"/>
-            </a:schemeClr>
-          </a:lnRef>
-          <a:fillRef idx="1">
-            <a:schemeClr val="accent1"/>
-          </a:fillRef>
-          <a:effectRef idx="0">
-            <a:schemeClr val="accent1"/>
-          </a:effectRef>
-          <a:fontRef idx="minor">
-            <a:schemeClr val="lt1"/>
-          </a:fontRef>
-        </p:style>
-        <p:txBody>
-          <a:bodyPr rtlCol="0" anchor="ctr"/>
-          <a:lstStyle/>
-          <a:p>
-            <a:pPr algn="ctr"/>
-            <a:r>
-              <a:rPr lang="fr-FR" sz="1400" b="1" dirty="0">
-                <a:solidFill>
-                  <a:schemeClr val="tx1"/>
-                </a:solidFill>
-              </a:rPr>
-              <a:t>TP1a</a:t>
-            </a:r>
-          </a:p>
-        </p:txBody>
-      </p:sp>
-      <p:sp>
-        <p:nvSpPr>
-          <p:cNvPr id="24" name="Rectangle 23">
-            <a:extLst>
-              <a:ext uri="{FF2B5EF4-FFF2-40B4-BE49-F238E27FC236}">
-                <a16:creationId xmlns:a16="http://schemas.microsoft.com/office/drawing/2014/main" id="{A55B308B-A0ED-EE71-101C-399C83BDB167}"/>
-              </a:ext>
-            </a:extLst>
-          </p:cNvPr>
-          <p:cNvSpPr/>
-          <p:nvPr/>
-        </p:nvSpPr>
-        <p:spPr>
-          <a:xfrm>
-            <a:off x="10332720" y="3244334"/>
-            <a:ext cx="761073" cy="369332"/>
-          </a:xfrm>
-          <a:prstGeom prst="rect">
-            <a:avLst/>
-          </a:prstGeom>
-          <a:solidFill>
-            <a:schemeClr val="accent2">
-              <a:lumMod val="60000"/>
-              <a:lumOff val="40000"/>
-            </a:schemeClr>
-          </a:solidFill>
-          <a:ln>
-            <a:noFill/>
-          </a:ln>
-        </p:spPr>
-        <p:style>
-          <a:lnRef idx="2">
-            <a:schemeClr val="accent1">
-              <a:shade val="15000"/>
-            </a:schemeClr>
-          </a:lnRef>
-          <a:fillRef idx="1">
-            <a:schemeClr val="accent1"/>
-          </a:fillRef>
-          <a:effectRef idx="0">
-            <a:schemeClr val="accent1"/>
-          </a:effectRef>
-          <a:fontRef idx="minor">
-            <a:schemeClr val="lt1"/>
-          </a:fontRef>
-        </p:style>
-        <p:txBody>
-          <a:bodyPr rtlCol="0" anchor="ctr"/>
-          <a:lstStyle/>
-          <a:p>
-            <a:pPr algn="ctr"/>
-            <a:r>
-              <a:rPr lang="fr-FR" sz="1400" b="1" dirty="0">
-                <a:solidFill>
-                  <a:schemeClr val="tx1"/>
-                </a:solidFill>
-              </a:rPr>
-              <a:t>TP1b</a:t>
-            </a:r>
-          </a:p>
-        </p:txBody>
-      </p:sp>
-      <p:sp>
-        <p:nvSpPr>
-          <p:cNvPr id="34" name="Rectangle 33">
-            <a:extLst>
-              <a:ext uri="{FF2B5EF4-FFF2-40B4-BE49-F238E27FC236}">
-                <a16:creationId xmlns:a16="http://schemas.microsoft.com/office/drawing/2014/main" id="{231AEDD3-1185-3F17-602B-541D15EE942F}"/>
-              </a:ext>
-            </a:extLst>
-          </p:cNvPr>
-          <p:cNvSpPr/>
-          <p:nvPr/>
-        </p:nvSpPr>
-        <p:spPr>
-          <a:xfrm>
-            <a:off x="10332720" y="3644307"/>
-            <a:ext cx="761073" cy="369332"/>
-          </a:xfrm>
-          <a:prstGeom prst="rect">
-            <a:avLst/>
-          </a:prstGeom>
-          <a:solidFill>
-            <a:srgbClr val="92D050"/>
-          </a:solidFill>
-          <a:ln>
-            <a:noFill/>
-          </a:ln>
-        </p:spPr>
-        <p:style>
-          <a:lnRef idx="2">
-            <a:schemeClr val="accent1">
-              <a:shade val="15000"/>
-            </a:schemeClr>
-          </a:lnRef>
-          <a:fillRef idx="1">
-            <a:schemeClr val="accent1"/>
-          </a:fillRef>
-          <a:effectRef idx="0">
-            <a:schemeClr val="accent1"/>
-          </a:effectRef>
-          <a:fontRef idx="minor">
-            <a:schemeClr val="lt1"/>
-          </a:fontRef>
-        </p:style>
-        <p:txBody>
-          <a:bodyPr rtlCol="0" anchor="ctr"/>
-          <a:lstStyle/>
-          <a:p>
-            <a:pPr algn="ctr"/>
-            <a:r>
-              <a:rPr lang="fr-FR" sz="1400" b="1" dirty="0">
-                <a:solidFill>
-                  <a:schemeClr val="tx1"/>
-                </a:solidFill>
-              </a:rPr>
-              <a:t>TP2a</a:t>
-            </a:r>
-          </a:p>
-        </p:txBody>
-      </p:sp>
-      <p:sp>
-        <p:nvSpPr>
-          <p:cNvPr id="42" name="Rectangle 41">
-            <a:extLst>
-              <a:ext uri="{FF2B5EF4-FFF2-40B4-BE49-F238E27FC236}">
-                <a16:creationId xmlns:a16="http://schemas.microsoft.com/office/drawing/2014/main" id="{AF371019-338B-2DC6-52EA-B5A48F5182A4}"/>
-              </a:ext>
-            </a:extLst>
-          </p:cNvPr>
-          <p:cNvSpPr/>
-          <p:nvPr/>
-        </p:nvSpPr>
-        <p:spPr>
-          <a:xfrm>
-            <a:off x="10332720" y="4044280"/>
-            <a:ext cx="761073" cy="369332"/>
-          </a:xfrm>
-          <a:prstGeom prst="rect">
-            <a:avLst/>
-          </a:prstGeom>
-          <a:solidFill>
-            <a:srgbClr val="92D050"/>
-          </a:solidFill>
-          <a:ln>
-            <a:noFill/>
-          </a:ln>
-        </p:spPr>
-        <p:style>
-          <a:lnRef idx="2">
-            <a:schemeClr val="accent1">
-              <a:shade val="15000"/>
-            </a:schemeClr>
-          </a:lnRef>
-          <a:fillRef idx="1">
-            <a:schemeClr val="accent1"/>
-          </a:fillRef>
-          <a:effectRef idx="0">
-            <a:schemeClr val="accent1"/>
-          </a:effectRef>
-          <a:fontRef idx="minor">
-            <a:schemeClr val="lt1"/>
-          </a:fontRef>
-        </p:style>
-        <p:txBody>
-          <a:bodyPr rtlCol="0" anchor="ctr"/>
-          <a:lstStyle/>
-          <a:p>
-            <a:pPr algn="ctr"/>
-            <a:r>
-              <a:rPr lang="fr-FR" sz="1400" b="1" dirty="0">
-                <a:solidFill>
-                  <a:schemeClr val="tx1"/>
-                </a:solidFill>
-              </a:rPr>
-              <a:t>TP2b</a:t>
-            </a:r>
-          </a:p>
-        </p:txBody>
-      </p:sp>
-      <p:sp>
-        <p:nvSpPr>
-          <p:cNvPr id="57" name="Rectangle 56">
-            <a:extLst>
-              <a:ext uri="{FF2B5EF4-FFF2-40B4-BE49-F238E27FC236}">
-                <a16:creationId xmlns:a16="http://schemas.microsoft.com/office/drawing/2014/main" id="{F3644267-393D-B72B-8EF1-30F3F59D7AA1}"/>
-              </a:ext>
-            </a:extLst>
-          </p:cNvPr>
-          <p:cNvSpPr/>
-          <p:nvPr/>
-        </p:nvSpPr>
-        <p:spPr>
-          <a:xfrm>
-            <a:off x="10332720" y="5198049"/>
-            <a:ext cx="761073" cy="369332"/>
-          </a:xfrm>
-          <a:prstGeom prst="rect">
-            <a:avLst/>
-          </a:prstGeom>
-          <a:solidFill>
-            <a:srgbClr val="92D050"/>
-          </a:solidFill>
-          <a:ln>
-            <a:noFill/>
-          </a:ln>
-        </p:spPr>
-        <p:style>
-          <a:lnRef idx="2">
-            <a:schemeClr val="accent1">
-              <a:shade val="15000"/>
-            </a:schemeClr>
-          </a:lnRef>
-          <a:fillRef idx="1">
-            <a:schemeClr val="accent1"/>
-          </a:fillRef>
-          <a:effectRef idx="0">
-            <a:schemeClr val="accent1"/>
-          </a:effectRef>
-          <a:fontRef idx="minor">
-            <a:schemeClr val="lt1"/>
-          </a:fontRef>
-        </p:style>
-        <p:txBody>
-          <a:bodyPr rtlCol="0" anchor="ctr"/>
-          <a:lstStyle/>
-          <a:p>
-            <a:pPr algn="ctr"/>
-            <a:r>
-              <a:rPr lang="fr-FR" sz="1400" b="1" dirty="0">
-                <a:solidFill>
-                  <a:schemeClr val="tx1"/>
-                </a:solidFill>
-              </a:rPr>
-              <a:t>TP3a</a:t>
-            </a:r>
-          </a:p>
-        </p:txBody>
-      </p:sp>
-      <p:sp>
-        <p:nvSpPr>
-          <p:cNvPr id="58" name="Rectangle 57">
-            <a:extLst>
-              <a:ext uri="{FF2B5EF4-FFF2-40B4-BE49-F238E27FC236}">
-                <a16:creationId xmlns:a16="http://schemas.microsoft.com/office/drawing/2014/main" id="{C222A4F5-BE04-F25B-4CB3-05D5BEF601FC}"/>
-              </a:ext>
-            </a:extLst>
-          </p:cNvPr>
-          <p:cNvSpPr/>
-          <p:nvPr/>
-        </p:nvSpPr>
-        <p:spPr>
-          <a:xfrm>
-            <a:off x="10332720" y="5598022"/>
-            <a:ext cx="761073" cy="369332"/>
-          </a:xfrm>
-          <a:prstGeom prst="rect">
-            <a:avLst/>
-          </a:prstGeom>
-          <a:solidFill>
-            <a:srgbClr val="92D050"/>
-          </a:solidFill>
-          <a:ln>
-            <a:noFill/>
-          </a:ln>
-        </p:spPr>
-        <p:style>
-          <a:lnRef idx="2">
-            <a:schemeClr val="accent1">
-              <a:shade val="15000"/>
-            </a:schemeClr>
-          </a:lnRef>
-          <a:fillRef idx="1">
-            <a:schemeClr val="accent1"/>
-          </a:fillRef>
-          <a:effectRef idx="0">
-            <a:schemeClr val="accent1"/>
-          </a:effectRef>
-          <a:fontRef idx="minor">
-            <a:schemeClr val="lt1"/>
-          </a:fontRef>
-        </p:style>
-        <p:txBody>
-          <a:bodyPr rtlCol="0" anchor="ctr"/>
-          <a:lstStyle/>
-          <a:p>
-            <a:pPr algn="ctr"/>
-            <a:r>
-              <a:rPr lang="fr-FR" sz="1400" b="1" dirty="0">
-                <a:solidFill>
-                  <a:schemeClr val="tx1"/>
-                </a:solidFill>
-              </a:rPr>
-              <a:t>TP3b</a:t>
-            </a:r>
-          </a:p>
-        </p:txBody>
-      </p:sp>
-      <p:sp>
-        <p:nvSpPr>
-          <p:cNvPr id="61" name="Rectangle 60">
-            <a:extLst>
-              <a:ext uri="{FF2B5EF4-FFF2-40B4-BE49-F238E27FC236}">
-                <a16:creationId xmlns:a16="http://schemas.microsoft.com/office/drawing/2014/main" id="{86ED91B5-BE1C-D3CA-FAB2-412C0BAD0598}"/>
-              </a:ext>
-            </a:extLst>
-          </p:cNvPr>
-          <p:cNvSpPr/>
-          <p:nvPr/>
-        </p:nvSpPr>
-        <p:spPr>
-          <a:xfrm>
-            <a:off x="10130029" y="1485258"/>
-            <a:ext cx="1554480" cy="146304"/>
-          </a:xfrm>
-          <a:prstGeom prst="rect">
-            <a:avLst/>
-          </a:prstGeom>
-          <a:solidFill>
-            <a:srgbClr val="00B0F0"/>
-          </a:solidFill>
-        </p:spPr>
-        <p:style>
-          <a:lnRef idx="2">
-            <a:schemeClr val="accent1">
-              <a:shade val="15000"/>
-            </a:schemeClr>
-          </a:lnRef>
-          <a:fillRef idx="1">
-            <a:schemeClr val="accent1"/>
-          </a:fillRef>
-          <a:effectRef idx="0">
-            <a:schemeClr val="accent1"/>
-          </a:effectRef>
-          <a:fontRef idx="minor">
-            <a:schemeClr val="lt1"/>
-          </a:fontRef>
-        </p:style>
-        <p:txBody>
-          <a:bodyPr rtlCol="0" anchor="ctr"/>
-          <a:lstStyle/>
-          <a:p>
-            <a:pPr algn="ctr"/>
-            <a:r>
-              <a:rPr lang="fr-FR" sz="1100" dirty="0"/>
-              <a:t>ENTREPRISE</a:t>
-            </a:r>
-          </a:p>
-        </p:txBody>
-      </p:sp>
-      <p:sp>
-        <p:nvSpPr>
-          <p:cNvPr id="62" name="Rectangle 61">
-            <a:extLst>
-              <a:ext uri="{FF2B5EF4-FFF2-40B4-BE49-F238E27FC236}">
-                <a16:creationId xmlns:a16="http://schemas.microsoft.com/office/drawing/2014/main" id="{02BC9BF7-180C-22BC-170E-AF0C8AFA2518}"/>
-              </a:ext>
-            </a:extLst>
-          </p:cNvPr>
-          <p:cNvSpPr/>
-          <p:nvPr/>
-        </p:nvSpPr>
-        <p:spPr>
-          <a:xfrm>
-            <a:off x="10130029" y="2963188"/>
-            <a:ext cx="1554480" cy="146304"/>
-          </a:xfrm>
-          <a:prstGeom prst="rect">
-            <a:avLst/>
-          </a:prstGeom>
-          <a:solidFill>
-            <a:srgbClr val="00B0F0"/>
-          </a:solidFill>
-        </p:spPr>
-        <p:style>
-          <a:lnRef idx="2">
-            <a:schemeClr val="accent1">
-              <a:shade val="15000"/>
-            </a:schemeClr>
-          </a:lnRef>
-          <a:fillRef idx="1">
-            <a:schemeClr val="accent1"/>
-          </a:fillRef>
-          <a:effectRef idx="0">
-            <a:schemeClr val="accent1"/>
-          </a:effectRef>
-          <a:fontRef idx="minor">
-            <a:schemeClr val="lt1"/>
-          </a:fontRef>
-        </p:style>
-        <p:txBody>
-          <a:bodyPr rtlCol="0" anchor="ctr"/>
-          <a:lstStyle/>
-          <a:p>
-            <a:pPr algn="ctr"/>
-            <a:r>
-              <a:rPr lang="fr-FR" sz="1100" dirty="0"/>
-              <a:t>ENTREPRISE</a:t>
-            </a:r>
-          </a:p>
-        </p:txBody>
-      </p:sp>
-      <p:sp>
-        <p:nvSpPr>
-          <p:cNvPr id="63" name="Rectangle 62">
-            <a:extLst>
-              <a:ext uri="{FF2B5EF4-FFF2-40B4-BE49-F238E27FC236}">
-                <a16:creationId xmlns:a16="http://schemas.microsoft.com/office/drawing/2014/main" id="{022D5D26-4B21-EAC1-D3F5-ABAFA0E2AE3B}"/>
-              </a:ext>
-            </a:extLst>
-          </p:cNvPr>
-          <p:cNvSpPr/>
-          <p:nvPr/>
-        </p:nvSpPr>
-        <p:spPr>
-          <a:xfrm>
-            <a:off x="10130029" y="4518731"/>
-            <a:ext cx="1554480" cy="146304"/>
-          </a:xfrm>
-          <a:prstGeom prst="rect">
-            <a:avLst/>
-          </a:prstGeom>
-          <a:solidFill>
-            <a:srgbClr val="00B0F0"/>
-          </a:solidFill>
-        </p:spPr>
-        <p:style>
-          <a:lnRef idx="2">
-            <a:schemeClr val="accent1">
-              <a:shade val="15000"/>
-            </a:schemeClr>
-          </a:lnRef>
-          <a:fillRef idx="1">
-            <a:schemeClr val="accent1"/>
-          </a:fillRef>
-          <a:effectRef idx="0">
-            <a:schemeClr val="accent1"/>
-          </a:effectRef>
-          <a:fontRef idx="minor">
-            <a:schemeClr val="lt1"/>
-          </a:fontRef>
-        </p:style>
-        <p:txBody>
-          <a:bodyPr rtlCol="0" anchor="ctr"/>
-          <a:lstStyle/>
-          <a:p>
-            <a:pPr algn="ctr"/>
-            <a:r>
-              <a:rPr lang="fr-FR" sz="1100" dirty="0"/>
-              <a:t>ENTREPRISE</a:t>
-            </a:r>
-          </a:p>
-        </p:txBody>
-      </p:sp>
-      <p:sp>
-        <p:nvSpPr>
-          <p:cNvPr id="5" name="Rectangle 4">
-            <a:extLst>
-              <a:ext uri="{FF2B5EF4-FFF2-40B4-BE49-F238E27FC236}">
-                <a16:creationId xmlns:a16="http://schemas.microsoft.com/office/drawing/2014/main" id="{30E0DDE9-FC92-C570-DB5D-40DE4A3368ED}"/>
-              </a:ext>
-            </a:extLst>
-          </p:cNvPr>
-          <p:cNvSpPr/>
-          <p:nvPr/>
-        </p:nvSpPr>
-        <p:spPr>
-          <a:xfrm>
-            <a:off x="11297413" y="1702590"/>
-            <a:ext cx="387096" cy="369332"/>
-          </a:xfrm>
-          <a:prstGeom prst="rect">
-            <a:avLst/>
-          </a:prstGeom>
-          <a:solidFill>
-            <a:srgbClr val="002060"/>
-          </a:solidFill>
-          <a:ln>
-            <a:noFill/>
-          </a:ln>
-        </p:spPr>
-        <p:style>
-          <a:lnRef idx="2">
-            <a:schemeClr val="accent1">
-              <a:shade val="15000"/>
-            </a:schemeClr>
-          </a:lnRef>
-          <a:fillRef idx="1">
-            <a:schemeClr val="accent1"/>
-          </a:fillRef>
-          <a:effectRef idx="0">
-            <a:schemeClr val="accent1"/>
-          </a:effectRef>
-          <a:fontRef idx="minor">
-            <a:schemeClr val="lt1"/>
-          </a:fontRef>
-        </p:style>
-        <p:txBody>
-          <a:bodyPr rtlCol="0" anchor="ctr"/>
-          <a:lstStyle/>
-          <a:p>
-            <a:pPr algn="ctr"/>
-            <a:endParaRPr lang="fr-FR" sz="1600" dirty="0"/>
-          </a:p>
-        </p:txBody>
-      </p:sp>
-      <p:sp>
-        <p:nvSpPr>
-          <p:cNvPr id="19" name="Rectangle 18">
-            <a:extLst>
-              <a:ext uri="{FF2B5EF4-FFF2-40B4-BE49-F238E27FC236}">
-                <a16:creationId xmlns:a16="http://schemas.microsoft.com/office/drawing/2014/main" id="{73006338-9AA8-6D22-5C2B-DB60D4F1AA51}"/>
-              </a:ext>
-            </a:extLst>
-          </p:cNvPr>
-          <p:cNvSpPr/>
-          <p:nvPr/>
-        </p:nvSpPr>
-        <p:spPr>
-          <a:xfrm>
-            <a:off x="11297413" y="2102563"/>
-            <a:ext cx="387096" cy="369332"/>
-          </a:xfrm>
-          <a:prstGeom prst="rect">
-            <a:avLst/>
-          </a:prstGeom>
-          <a:solidFill>
-            <a:srgbClr val="002060"/>
-          </a:solidFill>
-          <a:ln>
-            <a:noFill/>
-          </a:ln>
-        </p:spPr>
-        <p:style>
-          <a:lnRef idx="2">
-            <a:schemeClr val="accent1">
-              <a:shade val="15000"/>
-            </a:schemeClr>
-          </a:lnRef>
-          <a:fillRef idx="1">
-            <a:schemeClr val="accent1"/>
-          </a:fillRef>
-          <a:effectRef idx="0">
-            <a:schemeClr val="accent1"/>
-          </a:effectRef>
-          <a:fontRef idx="minor">
-            <a:schemeClr val="lt1"/>
-          </a:fontRef>
-        </p:style>
-        <p:txBody>
-          <a:bodyPr rtlCol="0" anchor="ctr"/>
-          <a:lstStyle/>
-          <a:p>
-            <a:pPr algn="ctr"/>
-            <a:endParaRPr lang="fr-FR" sz="1600" dirty="0"/>
-          </a:p>
-        </p:txBody>
-      </p:sp>
-      <p:sp>
-        <p:nvSpPr>
-          <p:cNvPr id="25" name="Rectangle 24">
-            <a:extLst>
-              <a:ext uri="{FF2B5EF4-FFF2-40B4-BE49-F238E27FC236}">
-                <a16:creationId xmlns:a16="http://schemas.microsoft.com/office/drawing/2014/main" id="{2F1680B4-62D4-F9AD-A399-A6BA6E5C7B83}"/>
-              </a:ext>
-            </a:extLst>
-          </p:cNvPr>
-          <p:cNvSpPr/>
-          <p:nvPr/>
-        </p:nvSpPr>
-        <p:spPr>
-          <a:xfrm>
-            <a:off x="11297413" y="2502536"/>
-            <a:ext cx="387096" cy="369332"/>
-          </a:xfrm>
-          <a:prstGeom prst="rect">
-            <a:avLst/>
-          </a:prstGeom>
-          <a:solidFill>
-            <a:srgbClr val="002060"/>
-          </a:solidFill>
-          <a:ln>
-            <a:noFill/>
-          </a:ln>
-        </p:spPr>
-        <p:style>
-          <a:lnRef idx="2">
-            <a:schemeClr val="accent1">
-              <a:shade val="15000"/>
-            </a:schemeClr>
-          </a:lnRef>
-          <a:fillRef idx="1">
-            <a:schemeClr val="accent1"/>
-          </a:fillRef>
-          <a:effectRef idx="0">
-            <a:schemeClr val="accent1"/>
-          </a:effectRef>
-          <a:fontRef idx="minor">
-            <a:schemeClr val="lt1"/>
-          </a:fontRef>
-        </p:style>
-        <p:txBody>
-          <a:bodyPr rtlCol="0" anchor="ctr"/>
-          <a:lstStyle/>
-          <a:p>
-            <a:pPr algn="ctr"/>
-            <a:endParaRPr lang="fr-FR" sz="1600" dirty="0"/>
-          </a:p>
-        </p:txBody>
-      </p:sp>
-      <p:sp>
-        <p:nvSpPr>
-          <p:cNvPr id="26" name="Rectangle 25">
-            <a:extLst>
-              <a:ext uri="{FF2B5EF4-FFF2-40B4-BE49-F238E27FC236}">
-                <a16:creationId xmlns:a16="http://schemas.microsoft.com/office/drawing/2014/main" id="{84F30758-02C8-FA58-8ECE-950D797F8E15}"/>
-              </a:ext>
-            </a:extLst>
-          </p:cNvPr>
-          <p:cNvSpPr/>
-          <p:nvPr/>
-        </p:nvSpPr>
-        <p:spPr>
-          <a:xfrm>
-            <a:off x="11327289" y="3244334"/>
-            <a:ext cx="387096" cy="369332"/>
-          </a:xfrm>
-          <a:prstGeom prst="rect">
-            <a:avLst/>
-          </a:prstGeom>
-          <a:solidFill>
-            <a:srgbClr val="D6B4B2"/>
-          </a:solidFill>
-          <a:ln>
-            <a:noFill/>
-          </a:ln>
-        </p:spPr>
-        <p:style>
-          <a:lnRef idx="2">
-            <a:schemeClr val="accent1">
-              <a:shade val="15000"/>
-            </a:schemeClr>
-          </a:lnRef>
-          <a:fillRef idx="1">
-            <a:schemeClr val="accent1"/>
-          </a:fillRef>
-          <a:effectRef idx="0">
-            <a:schemeClr val="accent1"/>
-          </a:effectRef>
-          <a:fontRef idx="minor">
-            <a:schemeClr val="lt1"/>
-          </a:fontRef>
-        </p:style>
-        <p:txBody>
-          <a:bodyPr rtlCol="0" anchor="ctr"/>
-          <a:lstStyle/>
-          <a:p>
-            <a:pPr algn="ctr"/>
-            <a:r>
-              <a:rPr lang="fr-FR" sz="1600" dirty="0">
-                <a:solidFill>
-                  <a:schemeClr val="tx1"/>
-                </a:solidFill>
-              </a:rPr>
-              <a:t>x</a:t>
-            </a:r>
-          </a:p>
-        </p:txBody>
-      </p:sp>
-      <p:sp>
-        <p:nvSpPr>
-          <p:cNvPr id="27" name="Rectangle 26">
-            <a:extLst>
-              <a:ext uri="{FF2B5EF4-FFF2-40B4-BE49-F238E27FC236}">
-                <a16:creationId xmlns:a16="http://schemas.microsoft.com/office/drawing/2014/main" id="{8FEF5CFC-20F7-1C5F-0709-5D1710930474}"/>
-              </a:ext>
-            </a:extLst>
-          </p:cNvPr>
-          <p:cNvSpPr/>
-          <p:nvPr/>
-        </p:nvSpPr>
-        <p:spPr>
-          <a:xfrm>
-            <a:off x="11327289" y="3644307"/>
-            <a:ext cx="387096" cy="369332"/>
-          </a:xfrm>
-          <a:prstGeom prst="rect">
-            <a:avLst/>
-          </a:prstGeom>
-          <a:solidFill>
-            <a:srgbClr val="D6B4B2"/>
-          </a:solidFill>
-          <a:ln>
-            <a:noFill/>
-          </a:ln>
-        </p:spPr>
-        <p:style>
-          <a:lnRef idx="2">
-            <a:schemeClr val="accent1">
-              <a:shade val="15000"/>
-            </a:schemeClr>
-          </a:lnRef>
-          <a:fillRef idx="1">
-            <a:schemeClr val="accent1"/>
-          </a:fillRef>
-          <a:effectRef idx="0">
-            <a:schemeClr val="accent1"/>
-          </a:effectRef>
-          <a:fontRef idx="minor">
-            <a:schemeClr val="lt1"/>
-          </a:fontRef>
-        </p:style>
-        <p:txBody>
-          <a:bodyPr rtlCol="0" anchor="ctr"/>
-          <a:lstStyle/>
-          <a:p>
-            <a:pPr algn="ctr"/>
-            <a:endParaRPr lang="fr-FR" sz="1600" dirty="0"/>
-          </a:p>
-        </p:txBody>
-      </p:sp>
-      <p:sp>
-        <p:nvSpPr>
-          <p:cNvPr id="28" name="Rectangle 27">
-            <a:extLst>
-              <a:ext uri="{FF2B5EF4-FFF2-40B4-BE49-F238E27FC236}">
-                <a16:creationId xmlns:a16="http://schemas.microsoft.com/office/drawing/2014/main" id="{ED63D6CB-30C5-F0F8-78BF-360645DF63F0}"/>
-              </a:ext>
-            </a:extLst>
-          </p:cNvPr>
-          <p:cNvSpPr/>
-          <p:nvPr/>
-        </p:nvSpPr>
-        <p:spPr>
-          <a:xfrm>
-            <a:off x="11327289" y="4044280"/>
-            <a:ext cx="387096" cy="369332"/>
-          </a:xfrm>
-          <a:prstGeom prst="rect">
-            <a:avLst/>
-          </a:prstGeom>
-          <a:solidFill>
-            <a:srgbClr val="D6B4B2"/>
-          </a:solidFill>
-          <a:ln>
-            <a:noFill/>
-          </a:ln>
-        </p:spPr>
-        <p:style>
-          <a:lnRef idx="2">
-            <a:schemeClr val="accent1">
-              <a:shade val="15000"/>
-            </a:schemeClr>
-          </a:lnRef>
-          <a:fillRef idx="1">
-            <a:schemeClr val="accent1"/>
-          </a:fillRef>
-          <a:effectRef idx="0">
-            <a:schemeClr val="accent1"/>
-          </a:effectRef>
-          <a:fontRef idx="minor">
-            <a:schemeClr val="lt1"/>
-          </a:fontRef>
-        </p:style>
-        <p:txBody>
-          <a:bodyPr rtlCol="0" anchor="ctr"/>
-          <a:lstStyle/>
-          <a:p>
-            <a:pPr algn="ctr"/>
-            <a:endParaRPr lang="fr-FR" sz="1600" dirty="0"/>
-          </a:p>
-        </p:txBody>
-      </p:sp>
-      <p:sp>
-        <p:nvSpPr>
-          <p:cNvPr id="29" name="Rectangle 28">
-            <a:extLst>
-              <a:ext uri="{FF2B5EF4-FFF2-40B4-BE49-F238E27FC236}">
-                <a16:creationId xmlns:a16="http://schemas.microsoft.com/office/drawing/2014/main" id="{306D69D5-9D1A-F869-7CC7-6C4B5543048D}"/>
-              </a:ext>
-            </a:extLst>
-          </p:cNvPr>
-          <p:cNvSpPr/>
-          <p:nvPr/>
-        </p:nvSpPr>
-        <p:spPr>
-          <a:xfrm>
-            <a:off x="11327289" y="4798076"/>
-            <a:ext cx="387096" cy="369332"/>
-          </a:xfrm>
-          <a:prstGeom prst="rect">
-            <a:avLst/>
-          </a:prstGeom>
-          <a:solidFill>
-            <a:srgbClr val="92D050"/>
-          </a:solidFill>
-          <a:ln>
-            <a:noFill/>
-          </a:ln>
-        </p:spPr>
-        <p:style>
-          <a:lnRef idx="2">
-            <a:schemeClr val="accent1">
-              <a:shade val="15000"/>
-            </a:schemeClr>
-          </a:lnRef>
-          <a:fillRef idx="1">
-            <a:schemeClr val="accent1"/>
-          </a:fillRef>
-          <a:effectRef idx="0">
-            <a:schemeClr val="accent1"/>
-          </a:effectRef>
-          <a:fontRef idx="minor">
-            <a:schemeClr val="lt1"/>
-          </a:fontRef>
-        </p:style>
-        <p:txBody>
-          <a:bodyPr rtlCol="0" anchor="ctr"/>
-          <a:lstStyle/>
-          <a:p>
-            <a:pPr algn="ctr"/>
-            <a:endParaRPr lang="fr-FR" sz="1600" dirty="0"/>
-          </a:p>
-        </p:txBody>
-      </p:sp>
-      <p:sp>
-        <p:nvSpPr>
-          <p:cNvPr id="30" name="Rectangle 29">
-            <a:extLst>
-              <a:ext uri="{FF2B5EF4-FFF2-40B4-BE49-F238E27FC236}">
-                <a16:creationId xmlns:a16="http://schemas.microsoft.com/office/drawing/2014/main" id="{0AFE9FC1-32A2-CAD0-B29E-DCC63FB8FBD8}"/>
-              </a:ext>
-            </a:extLst>
-          </p:cNvPr>
-          <p:cNvSpPr/>
-          <p:nvPr/>
-        </p:nvSpPr>
-        <p:spPr>
-          <a:xfrm>
-            <a:off x="11327289" y="5198049"/>
-            <a:ext cx="387096" cy="369332"/>
-          </a:xfrm>
-          <a:prstGeom prst="rect">
-            <a:avLst/>
-          </a:prstGeom>
-          <a:solidFill>
-            <a:srgbClr val="92D050"/>
-          </a:solidFill>
-          <a:ln>
-            <a:noFill/>
-          </a:ln>
-        </p:spPr>
-        <p:style>
-          <a:lnRef idx="2">
-            <a:schemeClr val="accent1">
-              <a:shade val="15000"/>
-            </a:schemeClr>
-          </a:lnRef>
-          <a:fillRef idx="1">
-            <a:schemeClr val="accent1"/>
-          </a:fillRef>
-          <a:effectRef idx="0">
-            <a:schemeClr val="accent1"/>
-          </a:effectRef>
-          <a:fontRef idx="minor">
-            <a:schemeClr val="lt1"/>
-          </a:fontRef>
-        </p:style>
-        <p:txBody>
-          <a:bodyPr rtlCol="0" anchor="ctr"/>
-          <a:lstStyle/>
-          <a:p>
-            <a:pPr algn="ctr"/>
-            <a:endParaRPr lang="fr-FR" sz="1600" dirty="0"/>
-          </a:p>
-        </p:txBody>
-      </p:sp>
-      <p:sp>
-        <p:nvSpPr>
-          <p:cNvPr id="31" name="Rectangle 30">
-            <a:extLst>
-              <a:ext uri="{FF2B5EF4-FFF2-40B4-BE49-F238E27FC236}">
-                <a16:creationId xmlns:a16="http://schemas.microsoft.com/office/drawing/2014/main" id="{B964479B-77F9-1529-726F-721AEE16CD00}"/>
-              </a:ext>
-            </a:extLst>
-          </p:cNvPr>
-          <p:cNvSpPr/>
-          <p:nvPr/>
-        </p:nvSpPr>
-        <p:spPr>
-          <a:xfrm>
-            <a:off x="11327289" y="5598022"/>
-            <a:ext cx="387096" cy="369332"/>
-          </a:xfrm>
-          <a:prstGeom prst="rect">
-            <a:avLst/>
-          </a:prstGeom>
-          <a:solidFill>
-            <a:srgbClr val="002060"/>
-          </a:solidFill>
-          <a:ln>
-            <a:noFill/>
-          </a:ln>
-        </p:spPr>
-        <p:style>
-          <a:lnRef idx="2">
-            <a:schemeClr val="accent1">
-              <a:shade val="15000"/>
-            </a:schemeClr>
-          </a:lnRef>
-          <a:fillRef idx="1">
-            <a:schemeClr val="accent1"/>
-          </a:fillRef>
-          <a:effectRef idx="0">
-            <a:schemeClr val="accent1"/>
-          </a:effectRef>
-          <a:fontRef idx="minor">
-            <a:schemeClr val="lt1"/>
-          </a:fontRef>
-        </p:style>
-        <p:txBody>
-          <a:bodyPr rtlCol="0" anchor="ctr"/>
-          <a:lstStyle/>
-          <a:p>
-            <a:pPr algn="ctr"/>
-            <a:endParaRPr lang="fr-FR" sz="1600" dirty="0"/>
           </a:p>
         </p:txBody>
       </p:sp>
@@ -10032,6 +9115,1071 @@
                 <a:srgbClr val="0070C0"/>
               </a:solidFill>
             </a:endParaRPr>
+          </a:p>
+        </p:txBody>
+      </p:sp>
+      <p:sp>
+        <p:nvSpPr>
+          <p:cNvPr id="6" name="Rectangle 5">
+            <a:extLst>
+              <a:ext uri="{FF2B5EF4-FFF2-40B4-BE49-F238E27FC236}">
+                <a16:creationId xmlns:a16="http://schemas.microsoft.com/office/drawing/2014/main" id="{0E18DA5F-0AD4-93F3-84B5-E08126B531BC}"/>
+              </a:ext>
+            </a:extLst>
+          </p:cNvPr>
+          <p:cNvSpPr/>
+          <p:nvPr/>
+        </p:nvSpPr>
+        <p:spPr>
+          <a:xfrm>
+            <a:off x="11297413" y="1702590"/>
+            <a:ext cx="387096" cy="369332"/>
+          </a:xfrm>
+          <a:prstGeom prst="rect">
+            <a:avLst/>
+          </a:prstGeom>
+          <a:solidFill>
+            <a:schemeClr val="bg1"/>
+          </a:solidFill>
+          <a:ln>
+            <a:solidFill>
+              <a:srgbClr val="002060"/>
+            </a:solidFill>
+          </a:ln>
+        </p:spPr>
+        <p:style>
+          <a:lnRef idx="2">
+            <a:schemeClr val="accent1">
+              <a:shade val="15000"/>
+            </a:schemeClr>
+          </a:lnRef>
+          <a:fillRef idx="1">
+            <a:schemeClr val="accent1"/>
+          </a:fillRef>
+          <a:effectRef idx="0">
+            <a:schemeClr val="accent1"/>
+          </a:effectRef>
+          <a:fontRef idx="minor">
+            <a:schemeClr val="lt1"/>
+          </a:fontRef>
+        </p:style>
+        <p:txBody>
+          <a:bodyPr rtlCol="0" anchor="ctr"/>
+          <a:lstStyle/>
+          <a:p>
+            <a:pPr algn="ctr"/>
+            <a:endParaRPr lang="fr-FR" sz="1600" dirty="0"/>
+          </a:p>
+        </p:txBody>
+      </p:sp>
+      <p:sp>
+        <p:nvSpPr>
+          <p:cNvPr id="8" name="Rectangle 7">
+            <a:extLst>
+              <a:ext uri="{FF2B5EF4-FFF2-40B4-BE49-F238E27FC236}">
+                <a16:creationId xmlns:a16="http://schemas.microsoft.com/office/drawing/2014/main" id="{0D47EA25-795B-9ECE-0BEF-520144100EAE}"/>
+              </a:ext>
+            </a:extLst>
+          </p:cNvPr>
+          <p:cNvSpPr/>
+          <p:nvPr/>
+        </p:nvSpPr>
+        <p:spPr>
+          <a:xfrm>
+            <a:off x="10332720" y="2102563"/>
+            <a:ext cx="731197" cy="369332"/>
+          </a:xfrm>
+          <a:prstGeom prst="rect">
+            <a:avLst/>
+          </a:prstGeom>
+          <a:solidFill>
+            <a:schemeClr val="accent2">
+              <a:lumMod val="60000"/>
+              <a:lumOff val="40000"/>
+            </a:schemeClr>
+          </a:solidFill>
+          <a:ln>
+            <a:noFill/>
+          </a:ln>
+        </p:spPr>
+        <p:style>
+          <a:lnRef idx="2">
+            <a:schemeClr val="accent1">
+              <a:shade val="15000"/>
+            </a:schemeClr>
+          </a:lnRef>
+          <a:fillRef idx="1">
+            <a:schemeClr val="accent1"/>
+          </a:fillRef>
+          <a:effectRef idx="0">
+            <a:schemeClr val="accent1"/>
+          </a:effectRef>
+          <a:fontRef idx="minor">
+            <a:schemeClr val="lt1"/>
+          </a:fontRef>
+        </p:style>
+        <p:txBody>
+          <a:bodyPr rtlCol="0" anchor="ctr"/>
+          <a:lstStyle/>
+          <a:p>
+            <a:pPr algn="ctr"/>
+            <a:r>
+              <a:rPr lang="fr-FR" sz="1400" b="1" dirty="0">
+                <a:solidFill>
+                  <a:schemeClr val="tx1"/>
+                </a:solidFill>
+              </a:rPr>
+              <a:t>TP1a</a:t>
+            </a:r>
+          </a:p>
+        </p:txBody>
+      </p:sp>
+      <p:sp>
+        <p:nvSpPr>
+          <p:cNvPr id="11" name="Rectangle 10">
+            <a:extLst>
+              <a:ext uri="{FF2B5EF4-FFF2-40B4-BE49-F238E27FC236}">
+                <a16:creationId xmlns:a16="http://schemas.microsoft.com/office/drawing/2014/main" id="{305B1E61-1FC6-B0DA-631F-B9FA6C707715}"/>
+              </a:ext>
+            </a:extLst>
+          </p:cNvPr>
+          <p:cNvSpPr/>
+          <p:nvPr/>
+        </p:nvSpPr>
+        <p:spPr>
+          <a:xfrm>
+            <a:off x="11297413" y="2102563"/>
+            <a:ext cx="387096" cy="369332"/>
+          </a:xfrm>
+          <a:prstGeom prst="rect">
+            <a:avLst/>
+          </a:prstGeom>
+          <a:solidFill>
+            <a:srgbClr val="002060"/>
+          </a:solidFill>
+          <a:ln>
+            <a:noFill/>
+          </a:ln>
+        </p:spPr>
+        <p:style>
+          <a:lnRef idx="2">
+            <a:schemeClr val="accent1">
+              <a:shade val="15000"/>
+            </a:schemeClr>
+          </a:lnRef>
+          <a:fillRef idx="1">
+            <a:schemeClr val="accent1"/>
+          </a:fillRef>
+          <a:effectRef idx="0">
+            <a:schemeClr val="accent1"/>
+          </a:effectRef>
+          <a:fontRef idx="minor">
+            <a:schemeClr val="lt1"/>
+          </a:fontRef>
+        </p:style>
+        <p:txBody>
+          <a:bodyPr rtlCol="0" anchor="ctr"/>
+          <a:lstStyle/>
+          <a:p>
+            <a:pPr algn="ctr"/>
+            <a:r>
+              <a:rPr lang="fr-FR" sz="1600" dirty="0"/>
+              <a:t>1</a:t>
+            </a:r>
+          </a:p>
+        </p:txBody>
+      </p:sp>
+      <p:sp>
+        <p:nvSpPr>
+          <p:cNvPr id="13" name="Rectangle 12">
+            <a:extLst>
+              <a:ext uri="{FF2B5EF4-FFF2-40B4-BE49-F238E27FC236}">
+                <a16:creationId xmlns:a16="http://schemas.microsoft.com/office/drawing/2014/main" id="{CBF6C510-B666-7CE2-2AB5-7C504E291943}"/>
+              </a:ext>
+            </a:extLst>
+          </p:cNvPr>
+          <p:cNvSpPr/>
+          <p:nvPr/>
+        </p:nvSpPr>
+        <p:spPr>
+          <a:xfrm>
+            <a:off x="11297413" y="2502536"/>
+            <a:ext cx="387096" cy="369332"/>
+          </a:xfrm>
+          <a:prstGeom prst="rect">
+            <a:avLst/>
+          </a:prstGeom>
+          <a:solidFill>
+            <a:srgbClr val="002060"/>
+          </a:solidFill>
+          <a:ln>
+            <a:noFill/>
+          </a:ln>
+        </p:spPr>
+        <p:style>
+          <a:lnRef idx="2">
+            <a:schemeClr val="accent1">
+              <a:shade val="15000"/>
+            </a:schemeClr>
+          </a:lnRef>
+          <a:fillRef idx="1">
+            <a:schemeClr val="accent1"/>
+          </a:fillRef>
+          <a:effectRef idx="0">
+            <a:schemeClr val="accent1"/>
+          </a:effectRef>
+          <a:fontRef idx="minor">
+            <a:schemeClr val="lt1"/>
+          </a:fontRef>
+        </p:style>
+        <p:txBody>
+          <a:bodyPr rtlCol="0" anchor="ctr"/>
+          <a:lstStyle/>
+          <a:p>
+            <a:pPr algn="ctr"/>
+            <a:r>
+              <a:rPr lang="fr-FR" sz="1600" dirty="0"/>
+              <a:t>2</a:t>
+            </a:r>
+          </a:p>
+        </p:txBody>
+      </p:sp>
+      <p:sp>
+        <p:nvSpPr>
+          <p:cNvPr id="14" name="Rectangle 13">
+            <a:extLst>
+              <a:ext uri="{FF2B5EF4-FFF2-40B4-BE49-F238E27FC236}">
+                <a16:creationId xmlns:a16="http://schemas.microsoft.com/office/drawing/2014/main" id="{A06382EE-57A7-6A1B-093D-0B149E4879A5}"/>
+              </a:ext>
+            </a:extLst>
+          </p:cNvPr>
+          <p:cNvSpPr/>
+          <p:nvPr/>
+        </p:nvSpPr>
+        <p:spPr>
+          <a:xfrm>
+            <a:off x="11327289" y="4467223"/>
+            <a:ext cx="387096" cy="369332"/>
+          </a:xfrm>
+          <a:prstGeom prst="rect">
+            <a:avLst/>
+          </a:prstGeom>
+          <a:solidFill>
+            <a:srgbClr val="002060"/>
+          </a:solidFill>
+          <a:ln>
+            <a:noFill/>
+          </a:ln>
+        </p:spPr>
+        <p:style>
+          <a:lnRef idx="2">
+            <a:schemeClr val="accent1">
+              <a:shade val="15000"/>
+            </a:schemeClr>
+          </a:lnRef>
+          <a:fillRef idx="1">
+            <a:schemeClr val="accent1"/>
+          </a:fillRef>
+          <a:effectRef idx="0">
+            <a:schemeClr val="accent1"/>
+          </a:effectRef>
+          <a:fontRef idx="minor">
+            <a:schemeClr val="lt1"/>
+          </a:fontRef>
+        </p:style>
+        <p:txBody>
+          <a:bodyPr rtlCol="0" anchor="ctr"/>
+          <a:lstStyle/>
+          <a:p>
+            <a:pPr algn="ctr"/>
+            <a:r>
+              <a:rPr lang="fr-FR" sz="1600" dirty="0"/>
+              <a:t>7</a:t>
+            </a:r>
+          </a:p>
+        </p:txBody>
+      </p:sp>
+      <p:sp>
+        <p:nvSpPr>
+          <p:cNvPr id="15" name="Rectangle 14">
+            <a:extLst>
+              <a:ext uri="{FF2B5EF4-FFF2-40B4-BE49-F238E27FC236}">
+                <a16:creationId xmlns:a16="http://schemas.microsoft.com/office/drawing/2014/main" id="{86FFA0BD-30DF-57DA-E29F-562908B3F495}"/>
+              </a:ext>
+            </a:extLst>
+          </p:cNvPr>
+          <p:cNvSpPr/>
+          <p:nvPr/>
+        </p:nvSpPr>
+        <p:spPr>
+          <a:xfrm>
+            <a:off x="10332720" y="3244334"/>
+            <a:ext cx="761073" cy="369332"/>
+          </a:xfrm>
+          <a:prstGeom prst="rect">
+            <a:avLst/>
+          </a:prstGeom>
+          <a:solidFill>
+            <a:schemeClr val="accent2">
+              <a:lumMod val="60000"/>
+              <a:lumOff val="40000"/>
+            </a:schemeClr>
+          </a:solidFill>
+          <a:ln>
+            <a:noFill/>
+          </a:ln>
+        </p:spPr>
+        <p:style>
+          <a:lnRef idx="2">
+            <a:schemeClr val="accent1">
+              <a:shade val="15000"/>
+            </a:schemeClr>
+          </a:lnRef>
+          <a:fillRef idx="1">
+            <a:schemeClr val="accent1"/>
+          </a:fillRef>
+          <a:effectRef idx="0">
+            <a:schemeClr val="accent1"/>
+          </a:effectRef>
+          <a:fontRef idx="minor">
+            <a:schemeClr val="lt1"/>
+          </a:fontRef>
+        </p:style>
+        <p:txBody>
+          <a:bodyPr rtlCol="0" anchor="ctr"/>
+          <a:lstStyle/>
+          <a:p>
+            <a:pPr algn="ctr"/>
+            <a:r>
+              <a:rPr lang="fr-FR" sz="1400" b="1" dirty="0">
+                <a:solidFill>
+                  <a:schemeClr val="tx1"/>
+                </a:solidFill>
+              </a:rPr>
+              <a:t>TP1b</a:t>
+            </a:r>
+          </a:p>
+        </p:txBody>
+      </p:sp>
+      <p:sp>
+        <p:nvSpPr>
+          <p:cNvPr id="17" name="Rectangle 16">
+            <a:extLst>
+              <a:ext uri="{FF2B5EF4-FFF2-40B4-BE49-F238E27FC236}">
+                <a16:creationId xmlns:a16="http://schemas.microsoft.com/office/drawing/2014/main" id="{93AAE076-EF60-3323-EBE4-AB7F130AF21C}"/>
+              </a:ext>
+            </a:extLst>
+          </p:cNvPr>
+          <p:cNvSpPr/>
+          <p:nvPr/>
+        </p:nvSpPr>
+        <p:spPr>
+          <a:xfrm>
+            <a:off x="10332720" y="3644307"/>
+            <a:ext cx="761073" cy="369332"/>
+          </a:xfrm>
+          <a:prstGeom prst="rect">
+            <a:avLst/>
+          </a:prstGeom>
+          <a:solidFill>
+            <a:srgbClr val="92D050"/>
+          </a:solidFill>
+          <a:ln>
+            <a:noFill/>
+          </a:ln>
+        </p:spPr>
+        <p:style>
+          <a:lnRef idx="2">
+            <a:schemeClr val="accent1">
+              <a:shade val="15000"/>
+            </a:schemeClr>
+          </a:lnRef>
+          <a:fillRef idx="1">
+            <a:schemeClr val="accent1"/>
+          </a:fillRef>
+          <a:effectRef idx="0">
+            <a:schemeClr val="accent1"/>
+          </a:effectRef>
+          <a:fontRef idx="minor">
+            <a:schemeClr val="lt1"/>
+          </a:fontRef>
+        </p:style>
+        <p:txBody>
+          <a:bodyPr rtlCol="0" anchor="ctr"/>
+          <a:lstStyle/>
+          <a:p>
+            <a:pPr algn="ctr"/>
+            <a:r>
+              <a:rPr lang="fr-FR" sz="1400" b="1" dirty="0">
+                <a:solidFill>
+                  <a:schemeClr val="tx1"/>
+                </a:solidFill>
+              </a:rPr>
+              <a:t>TP2a</a:t>
+            </a:r>
+          </a:p>
+        </p:txBody>
+      </p:sp>
+      <p:sp>
+        <p:nvSpPr>
+          <p:cNvPr id="20" name="Rectangle 19">
+            <a:extLst>
+              <a:ext uri="{FF2B5EF4-FFF2-40B4-BE49-F238E27FC236}">
+                <a16:creationId xmlns:a16="http://schemas.microsoft.com/office/drawing/2014/main" id="{89DE5C60-1411-E660-E0CE-744675C47438}"/>
+              </a:ext>
+            </a:extLst>
+          </p:cNvPr>
+          <p:cNvSpPr/>
+          <p:nvPr/>
+        </p:nvSpPr>
+        <p:spPr>
+          <a:xfrm>
+            <a:off x="10332720" y="4044280"/>
+            <a:ext cx="761073" cy="369332"/>
+          </a:xfrm>
+          <a:prstGeom prst="rect">
+            <a:avLst/>
+          </a:prstGeom>
+          <a:solidFill>
+            <a:srgbClr val="92D050"/>
+          </a:solidFill>
+          <a:ln>
+            <a:noFill/>
+          </a:ln>
+        </p:spPr>
+        <p:style>
+          <a:lnRef idx="2">
+            <a:schemeClr val="accent1">
+              <a:shade val="15000"/>
+            </a:schemeClr>
+          </a:lnRef>
+          <a:fillRef idx="1">
+            <a:schemeClr val="accent1"/>
+          </a:fillRef>
+          <a:effectRef idx="0">
+            <a:schemeClr val="accent1"/>
+          </a:effectRef>
+          <a:fontRef idx="minor">
+            <a:schemeClr val="lt1"/>
+          </a:fontRef>
+        </p:style>
+        <p:txBody>
+          <a:bodyPr rtlCol="0" anchor="ctr"/>
+          <a:lstStyle/>
+          <a:p>
+            <a:pPr algn="ctr"/>
+            <a:r>
+              <a:rPr lang="fr-FR" sz="1400" b="1" dirty="0">
+                <a:solidFill>
+                  <a:schemeClr val="tx1"/>
+                </a:solidFill>
+              </a:rPr>
+              <a:t>TP2b</a:t>
+            </a:r>
+          </a:p>
+        </p:txBody>
+      </p:sp>
+      <p:sp>
+        <p:nvSpPr>
+          <p:cNvPr id="21" name="Rectangle 20">
+            <a:extLst>
+              <a:ext uri="{FF2B5EF4-FFF2-40B4-BE49-F238E27FC236}">
+                <a16:creationId xmlns:a16="http://schemas.microsoft.com/office/drawing/2014/main" id="{133C6E56-D7CB-C68F-15C4-40AD1DA1C62D}"/>
+              </a:ext>
+            </a:extLst>
+          </p:cNvPr>
+          <p:cNvSpPr/>
+          <p:nvPr/>
+        </p:nvSpPr>
+        <p:spPr>
+          <a:xfrm>
+            <a:off x="11327289" y="3644307"/>
+            <a:ext cx="387096" cy="369332"/>
+          </a:xfrm>
+          <a:prstGeom prst="rect">
+            <a:avLst/>
+          </a:prstGeom>
+          <a:solidFill>
+            <a:srgbClr val="D6B4B2"/>
+          </a:solidFill>
+          <a:ln>
+            <a:noFill/>
+          </a:ln>
+        </p:spPr>
+        <p:style>
+          <a:lnRef idx="2">
+            <a:schemeClr val="accent1">
+              <a:shade val="15000"/>
+            </a:schemeClr>
+          </a:lnRef>
+          <a:fillRef idx="1">
+            <a:schemeClr val="accent1"/>
+          </a:fillRef>
+          <a:effectRef idx="0">
+            <a:schemeClr val="accent1"/>
+          </a:effectRef>
+          <a:fontRef idx="minor">
+            <a:schemeClr val="lt1"/>
+          </a:fontRef>
+        </p:style>
+        <p:txBody>
+          <a:bodyPr rtlCol="0" anchor="ctr"/>
+          <a:lstStyle/>
+          <a:p>
+            <a:pPr algn="ctr"/>
+            <a:r>
+              <a:rPr lang="fr-FR" sz="1600" dirty="0"/>
+              <a:t>4</a:t>
+            </a:r>
+          </a:p>
+        </p:txBody>
+      </p:sp>
+      <p:sp>
+        <p:nvSpPr>
+          <p:cNvPr id="23" name="Rectangle 22">
+            <a:extLst>
+              <a:ext uri="{FF2B5EF4-FFF2-40B4-BE49-F238E27FC236}">
+                <a16:creationId xmlns:a16="http://schemas.microsoft.com/office/drawing/2014/main" id="{B30AD84C-60F6-5BA8-F49F-84175FAAC495}"/>
+              </a:ext>
+            </a:extLst>
+          </p:cNvPr>
+          <p:cNvSpPr/>
+          <p:nvPr/>
+        </p:nvSpPr>
+        <p:spPr>
+          <a:xfrm>
+            <a:off x="11327289" y="4044280"/>
+            <a:ext cx="387096" cy="369332"/>
+          </a:xfrm>
+          <a:prstGeom prst="rect">
+            <a:avLst/>
+          </a:prstGeom>
+          <a:solidFill>
+            <a:srgbClr val="002060"/>
+          </a:solidFill>
+          <a:ln>
+            <a:noFill/>
+          </a:ln>
+        </p:spPr>
+        <p:style>
+          <a:lnRef idx="2">
+            <a:schemeClr val="accent1">
+              <a:shade val="15000"/>
+            </a:schemeClr>
+          </a:lnRef>
+          <a:fillRef idx="1">
+            <a:schemeClr val="accent1"/>
+          </a:fillRef>
+          <a:effectRef idx="0">
+            <a:schemeClr val="accent1"/>
+          </a:effectRef>
+          <a:fontRef idx="minor">
+            <a:schemeClr val="lt1"/>
+          </a:fontRef>
+        </p:style>
+        <p:txBody>
+          <a:bodyPr rtlCol="0" anchor="ctr"/>
+          <a:lstStyle/>
+          <a:p>
+            <a:pPr algn="ctr"/>
+            <a:r>
+              <a:rPr lang="fr-FR" sz="1600" dirty="0"/>
+              <a:t>6</a:t>
+            </a:r>
+          </a:p>
+        </p:txBody>
+      </p:sp>
+      <p:sp>
+        <p:nvSpPr>
+          <p:cNvPr id="32" name="Rectangle 31">
+            <a:extLst>
+              <a:ext uri="{FF2B5EF4-FFF2-40B4-BE49-F238E27FC236}">
+                <a16:creationId xmlns:a16="http://schemas.microsoft.com/office/drawing/2014/main" id="{5F68C434-7A94-6E9D-FC77-0F53C5F05072}"/>
+              </a:ext>
+            </a:extLst>
+          </p:cNvPr>
+          <p:cNvSpPr/>
+          <p:nvPr/>
+        </p:nvSpPr>
+        <p:spPr>
+          <a:xfrm>
+            <a:off x="10332720" y="4479277"/>
+            <a:ext cx="761073" cy="369332"/>
+          </a:xfrm>
+          <a:prstGeom prst="rect">
+            <a:avLst/>
+          </a:prstGeom>
+          <a:solidFill>
+            <a:srgbClr val="92D050"/>
+          </a:solidFill>
+          <a:ln>
+            <a:noFill/>
+          </a:ln>
+        </p:spPr>
+        <p:style>
+          <a:lnRef idx="2">
+            <a:schemeClr val="accent1">
+              <a:shade val="15000"/>
+            </a:schemeClr>
+          </a:lnRef>
+          <a:fillRef idx="1">
+            <a:schemeClr val="accent1"/>
+          </a:fillRef>
+          <a:effectRef idx="0">
+            <a:schemeClr val="accent1"/>
+          </a:effectRef>
+          <a:fontRef idx="minor">
+            <a:schemeClr val="lt1"/>
+          </a:fontRef>
+        </p:style>
+        <p:txBody>
+          <a:bodyPr rtlCol="0" anchor="ctr"/>
+          <a:lstStyle/>
+          <a:p>
+            <a:pPr algn="ctr"/>
+            <a:r>
+              <a:rPr lang="fr-FR" sz="1400" b="1" dirty="0">
+                <a:solidFill>
+                  <a:schemeClr val="tx1"/>
+                </a:solidFill>
+              </a:rPr>
+              <a:t>TP3a</a:t>
+            </a:r>
+          </a:p>
+        </p:txBody>
+      </p:sp>
+      <p:sp>
+        <p:nvSpPr>
+          <p:cNvPr id="33" name="Rectangle 32">
+            <a:extLst>
+              <a:ext uri="{FF2B5EF4-FFF2-40B4-BE49-F238E27FC236}">
+                <a16:creationId xmlns:a16="http://schemas.microsoft.com/office/drawing/2014/main" id="{62A3F30D-0D63-EEFA-D4C0-8B7C2EC1B098}"/>
+              </a:ext>
+            </a:extLst>
+          </p:cNvPr>
+          <p:cNvSpPr/>
+          <p:nvPr/>
+        </p:nvSpPr>
+        <p:spPr>
+          <a:xfrm>
+            <a:off x="10332720" y="5221587"/>
+            <a:ext cx="761073" cy="369332"/>
+          </a:xfrm>
+          <a:prstGeom prst="rect">
+            <a:avLst/>
+          </a:prstGeom>
+          <a:solidFill>
+            <a:srgbClr val="92D050"/>
+          </a:solidFill>
+          <a:ln>
+            <a:noFill/>
+          </a:ln>
+        </p:spPr>
+        <p:style>
+          <a:lnRef idx="2">
+            <a:schemeClr val="accent1">
+              <a:shade val="15000"/>
+            </a:schemeClr>
+          </a:lnRef>
+          <a:fillRef idx="1">
+            <a:schemeClr val="accent1"/>
+          </a:fillRef>
+          <a:effectRef idx="0">
+            <a:schemeClr val="accent1"/>
+          </a:effectRef>
+          <a:fontRef idx="minor">
+            <a:schemeClr val="lt1"/>
+          </a:fontRef>
+        </p:style>
+        <p:txBody>
+          <a:bodyPr rtlCol="0" anchor="ctr"/>
+          <a:lstStyle/>
+          <a:p>
+            <a:pPr algn="ctr"/>
+            <a:r>
+              <a:rPr lang="fr-FR" sz="1400" b="1" dirty="0">
+                <a:solidFill>
+                  <a:schemeClr val="tx1"/>
+                </a:solidFill>
+              </a:rPr>
+              <a:t>TP3b</a:t>
+            </a:r>
+          </a:p>
+        </p:txBody>
+      </p:sp>
+      <p:sp>
+        <p:nvSpPr>
+          <p:cNvPr id="38" name="Rectangle 37">
+            <a:extLst>
+              <a:ext uri="{FF2B5EF4-FFF2-40B4-BE49-F238E27FC236}">
+                <a16:creationId xmlns:a16="http://schemas.microsoft.com/office/drawing/2014/main" id="{BC1C3E45-4BA1-914F-219D-D35E1478900C}"/>
+              </a:ext>
+            </a:extLst>
+          </p:cNvPr>
+          <p:cNvSpPr/>
+          <p:nvPr/>
+        </p:nvSpPr>
+        <p:spPr>
+          <a:xfrm>
+            <a:off x="11327289" y="5621560"/>
+            <a:ext cx="387096" cy="369332"/>
+          </a:xfrm>
+          <a:prstGeom prst="rect">
+            <a:avLst/>
+          </a:prstGeom>
+          <a:solidFill>
+            <a:srgbClr val="92D050"/>
+          </a:solidFill>
+          <a:ln>
+            <a:noFill/>
+          </a:ln>
+        </p:spPr>
+        <p:style>
+          <a:lnRef idx="2">
+            <a:schemeClr val="accent1">
+              <a:shade val="15000"/>
+            </a:schemeClr>
+          </a:lnRef>
+          <a:fillRef idx="1">
+            <a:schemeClr val="accent1"/>
+          </a:fillRef>
+          <a:effectRef idx="0">
+            <a:schemeClr val="accent1"/>
+          </a:effectRef>
+          <a:fontRef idx="minor">
+            <a:schemeClr val="lt1"/>
+          </a:fontRef>
+        </p:style>
+        <p:txBody>
+          <a:bodyPr rtlCol="0" anchor="ctr"/>
+          <a:lstStyle/>
+          <a:p>
+            <a:pPr algn="ctr"/>
+            <a:r>
+              <a:rPr lang="fr-FR" sz="1600" dirty="0"/>
+              <a:t>9</a:t>
+            </a:r>
+          </a:p>
+        </p:txBody>
+      </p:sp>
+      <p:sp>
+        <p:nvSpPr>
+          <p:cNvPr id="39" name="Rectangle 38">
+            <a:extLst>
+              <a:ext uri="{FF2B5EF4-FFF2-40B4-BE49-F238E27FC236}">
+                <a16:creationId xmlns:a16="http://schemas.microsoft.com/office/drawing/2014/main" id="{B71634D6-AAED-2215-8E88-5325996774F8}"/>
+              </a:ext>
+            </a:extLst>
+          </p:cNvPr>
+          <p:cNvSpPr/>
+          <p:nvPr/>
+        </p:nvSpPr>
+        <p:spPr>
+          <a:xfrm>
+            <a:off x="10703028" y="5625691"/>
+            <a:ext cx="387096" cy="369332"/>
+          </a:xfrm>
+          <a:prstGeom prst="rect">
+            <a:avLst/>
+          </a:prstGeom>
+          <a:solidFill>
+            <a:srgbClr val="92D050"/>
+          </a:solidFill>
+          <a:ln>
+            <a:noFill/>
+          </a:ln>
+        </p:spPr>
+        <p:style>
+          <a:lnRef idx="2">
+            <a:schemeClr val="accent1">
+              <a:shade val="15000"/>
+            </a:schemeClr>
+          </a:lnRef>
+          <a:fillRef idx="1">
+            <a:schemeClr val="accent1"/>
+          </a:fillRef>
+          <a:effectRef idx="0">
+            <a:schemeClr val="accent1"/>
+          </a:effectRef>
+          <a:fontRef idx="minor">
+            <a:schemeClr val="lt1"/>
+          </a:fontRef>
+        </p:style>
+        <p:txBody>
+          <a:bodyPr rtlCol="0" anchor="ctr"/>
+          <a:lstStyle/>
+          <a:p>
+            <a:pPr algn="ctr"/>
+            <a:r>
+              <a:rPr lang="fr-FR" sz="1600" dirty="0"/>
+              <a:t>8</a:t>
+            </a:r>
+          </a:p>
+        </p:txBody>
+      </p:sp>
+      <p:sp>
+        <p:nvSpPr>
+          <p:cNvPr id="40" name="Rectangle 39">
+            <a:extLst>
+              <a:ext uri="{FF2B5EF4-FFF2-40B4-BE49-F238E27FC236}">
+                <a16:creationId xmlns:a16="http://schemas.microsoft.com/office/drawing/2014/main" id="{47381F3D-9E98-9139-4D01-C869B4C617D5}"/>
+              </a:ext>
+            </a:extLst>
+          </p:cNvPr>
+          <p:cNvSpPr/>
+          <p:nvPr/>
+        </p:nvSpPr>
+        <p:spPr>
+          <a:xfrm>
+            <a:off x="10130029" y="1485258"/>
+            <a:ext cx="1554480" cy="146304"/>
+          </a:xfrm>
+          <a:prstGeom prst="rect">
+            <a:avLst/>
+          </a:prstGeom>
+          <a:solidFill>
+            <a:srgbClr val="00B0F0"/>
+          </a:solidFill>
+        </p:spPr>
+        <p:style>
+          <a:lnRef idx="2">
+            <a:schemeClr val="accent1">
+              <a:shade val="15000"/>
+            </a:schemeClr>
+          </a:lnRef>
+          <a:fillRef idx="1">
+            <a:schemeClr val="accent1"/>
+          </a:fillRef>
+          <a:effectRef idx="0">
+            <a:schemeClr val="accent1"/>
+          </a:effectRef>
+          <a:fontRef idx="minor">
+            <a:schemeClr val="lt1"/>
+          </a:fontRef>
+        </p:style>
+        <p:txBody>
+          <a:bodyPr rtlCol="0" anchor="ctr"/>
+          <a:lstStyle/>
+          <a:p>
+            <a:pPr algn="ctr"/>
+            <a:r>
+              <a:rPr lang="fr-FR" sz="1100" dirty="0"/>
+              <a:t>ENTREPRISE</a:t>
+            </a:r>
+          </a:p>
+        </p:txBody>
+      </p:sp>
+      <p:sp>
+        <p:nvSpPr>
+          <p:cNvPr id="41" name="Rectangle 40">
+            <a:extLst>
+              <a:ext uri="{FF2B5EF4-FFF2-40B4-BE49-F238E27FC236}">
+                <a16:creationId xmlns:a16="http://schemas.microsoft.com/office/drawing/2014/main" id="{C2296D2F-3105-6E42-0E23-4C73E0F8E075}"/>
+              </a:ext>
+            </a:extLst>
+          </p:cNvPr>
+          <p:cNvSpPr/>
+          <p:nvPr/>
+        </p:nvSpPr>
+        <p:spPr>
+          <a:xfrm>
+            <a:off x="10130029" y="2963188"/>
+            <a:ext cx="1554480" cy="146304"/>
+          </a:xfrm>
+          <a:prstGeom prst="rect">
+            <a:avLst/>
+          </a:prstGeom>
+          <a:solidFill>
+            <a:srgbClr val="00B0F0"/>
+          </a:solidFill>
+        </p:spPr>
+        <p:style>
+          <a:lnRef idx="2">
+            <a:schemeClr val="accent1">
+              <a:shade val="15000"/>
+            </a:schemeClr>
+          </a:lnRef>
+          <a:fillRef idx="1">
+            <a:schemeClr val="accent1"/>
+          </a:fillRef>
+          <a:effectRef idx="0">
+            <a:schemeClr val="accent1"/>
+          </a:effectRef>
+          <a:fontRef idx="minor">
+            <a:schemeClr val="lt1"/>
+          </a:fontRef>
+        </p:style>
+        <p:txBody>
+          <a:bodyPr rtlCol="0" anchor="ctr"/>
+          <a:lstStyle/>
+          <a:p>
+            <a:pPr algn="ctr"/>
+            <a:r>
+              <a:rPr lang="fr-FR" sz="1100" dirty="0"/>
+              <a:t>ENTREPRISE</a:t>
+            </a:r>
+          </a:p>
+        </p:txBody>
+      </p:sp>
+      <p:sp>
+        <p:nvSpPr>
+          <p:cNvPr id="43" name="Rectangle 42">
+            <a:extLst>
+              <a:ext uri="{FF2B5EF4-FFF2-40B4-BE49-F238E27FC236}">
+                <a16:creationId xmlns:a16="http://schemas.microsoft.com/office/drawing/2014/main" id="{715B3D20-CB6C-0E93-3EF1-20C3EAFE4897}"/>
+              </a:ext>
+            </a:extLst>
+          </p:cNvPr>
+          <p:cNvSpPr/>
+          <p:nvPr/>
+        </p:nvSpPr>
+        <p:spPr>
+          <a:xfrm>
+            <a:off x="10130029" y="4942242"/>
+            <a:ext cx="1554480" cy="146304"/>
+          </a:xfrm>
+          <a:prstGeom prst="rect">
+            <a:avLst/>
+          </a:prstGeom>
+          <a:solidFill>
+            <a:srgbClr val="00B0F0"/>
+          </a:solidFill>
+        </p:spPr>
+        <p:style>
+          <a:lnRef idx="2">
+            <a:schemeClr val="accent1">
+              <a:shade val="15000"/>
+            </a:schemeClr>
+          </a:lnRef>
+          <a:fillRef idx="1">
+            <a:schemeClr val="accent1"/>
+          </a:fillRef>
+          <a:effectRef idx="0">
+            <a:schemeClr val="accent1"/>
+          </a:effectRef>
+          <a:fontRef idx="minor">
+            <a:schemeClr val="lt1"/>
+          </a:fontRef>
+        </p:style>
+        <p:txBody>
+          <a:bodyPr rtlCol="0" anchor="ctr"/>
+          <a:lstStyle/>
+          <a:p>
+            <a:pPr algn="ctr"/>
+            <a:r>
+              <a:rPr lang="fr-FR" sz="1100" dirty="0"/>
+              <a:t>ENTREPRISE</a:t>
+            </a:r>
+          </a:p>
+        </p:txBody>
+      </p:sp>
+      <p:sp>
+        <p:nvSpPr>
+          <p:cNvPr id="44" name="Rectangle 43">
+            <a:extLst>
+              <a:ext uri="{FF2B5EF4-FFF2-40B4-BE49-F238E27FC236}">
+                <a16:creationId xmlns:a16="http://schemas.microsoft.com/office/drawing/2014/main" id="{D9466906-FB5D-D01B-F215-B7C12EBB8EE3}"/>
+              </a:ext>
+            </a:extLst>
+          </p:cNvPr>
+          <p:cNvSpPr/>
+          <p:nvPr/>
+        </p:nvSpPr>
+        <p:spPr>
+          <a:xfrm>
+            <a:off x="11327289" y="3237259"/>
+            <a:ext cx="387096" cy="369332"/>
+          </a:xfrm>
+          <a:prstGeom prst="rect">
+            <a:avLst/>
+          </a:prstGeom>
+          <a:solidFill>
+            <a:srgbClr val="D6B4B2"/>
+          </a:solidFill>
+          <a:ln>
+            <a:noFill/>
+          </a:ln>
+        </p:spPr>
+        <p:style>
+          <a:lnRef idx="2">
+            <a:schemeClr val="accent1">
+              <a:shade val="15000"/>
+            </a:schemeClr>
+          </a:lnRef>
+          <a:fillRef idx="1">
+            <a:schemeClr val="accent1"/>
+          </a:fillRef>
+          <a:effectRef idx="0">
+            <a:schemeClr val="accent1"/>
+          </a:effectRef>
+          <a:fontRef idx="minor">
+            <a:schemeClr val="lt1"/>
+          </a:fontRef>
+        </p:style>
+        <p:txBody>
+          <a:bodyPr rtlCol="0" anchor="ctr"/>
+          <a:lstStyle/>
+          <a:p>
+            <a:pPr algn="ctr"/>
+            <a:r>
+              <a:rPr lang="fr-FR" sz="1600" dirty="0"/>
+              <a:t>3</a:t>
+            </a:r>
+          </a:p>
+        </p:txBody>
+      </p:sp>
+      <p:sp>
+        <p:nvSpPr>
+          <p:cNvPr id="45" name="Rectangle 44">
+            <a:extLst>
+              <a:ext uri="{FF2B5EF4-FFF2-40B4-BE49-F238E27FC236}">
+                <a16:creationId xmlns:a16="http://schemas.microsoft.com/office/drawing/2014/main" id="{30EF09DA-7ACF-46A6-0511-16DD85AA49BB}"/>
+              </a:ext>
+            </a:extLst>
+          </p:cNvPr>
+          <p:cNvSpPr/>
+          <p:nvPr/>
+        </p:nvSpPr>
+        <p:spPr>
+          <a:xfrm>
+            <a:off x="9808481" y="4044280"/>
+            <a:ext cx="387096" cy="369332"/>
+          </a:xfrm>
+          <a:prstGeom prst="rect">
+            <a:avLst/>
+          </a:prstGeom>
+          <a:solidFill>
+            <a:srgbClr val="D6B4B2"/>
+          </a:solidFill>
+          <a:ln>
+            <a:noFill/>
+          </a:ln>
+        </p:spPr>
+        <p:style>
+          <a:lnRef idx="2">
+            <a:schemeClr val="accent1">
+              <a:shade val="15000"/>
+            </a:schemeClr>
+          </a:lnRef>
+          <a:fillRef idx="1">
+            <a:schemeClr val="accent1"/>
+          </a:fillRef>
+          <a:effectRef idx="0">
+            <a:schemeClr val="accent1"/>
+          </a:effectRef>
+          <a:fontRef idx="minor">
+            <a:schemeClr val="lt1"/>
+          </a:fontRef>
+        </p:style>
+        <p:txBody>
+          <a:bodyPr rtlCol="0" anchor="ctr"/>
+          <a:lstStyle/>
+          <a:p>
+            <a:pPr algn="ctr"/>
+            <a:r>
+              <a:rPr lang="fr-FR" sz="1600" dirty="0"/>
+              <a:t>5</a:t>
+            </a:r>
           </a:p>
         </p:txBody>
       </p:sp>
